--- a/Final_Revision/Exam_Practice/FR-L02_Speaking_Workshop_People_Home_and_Free_Time.pptx
+++ b/Final_Revision/Exam_Practice/FR-L02_Speaking_Workshop_People_Home_and_Free_Time.pptx
@@ -615,7 +615,11 @@
           <a:lstStyle/>
           <a:p>
             <a:r>
-              <a:rPr lang="en-US" dirty="0"/>
+              <a:rPr lang="ar-SA" dirty="0">
+                <a:latin typeface="Amiri" pitchFamily="2" charset="-78"/>
+                <a:ea typeface="Amiri" pitchFamily="2" charset="-78"/>
+                <a:cs typeface="Amiri" pitchFamily="2" charset="-78"/>
+              </a:rPr>
               <a:t>ROLE PLAY C (Develop) — a video call.
 SET-UP IN THE BREAKOUT ROOM: A = examiner (reads the left column ONLY — the questions, in order), B = candidate (sees the task column; Core may use the help column), C = observer (ticks the feedback checklist). 1 minute preparation, about 3 minutes speaking, 1 minute feedback, then rotate.
 Task ! is the unexpected question: in the exam the candidate has not seen it — the examiner should read it without warning.
@@ -707,7 +711,11 @@
           <a:lstStyle/>
           <a:p>
             <a:r>
-              <a:rPr lang="en-US" dirty="0"/>
+              <a:rPr lang="ar-SA" dirty="0">
+                <a:latin typeface="Amiri" pitchFamily="2" charset="-78"/>
+                <a:ea typeface="Amiri" pitchFamily="2" charset="-78"/>
+                <a:cs typeface="Amiri" pitchFamily="2" charset="-78"/>
+              </a:rPr>
               <a:t>ROLE PLAY D (Stretch) — a school podcast.
 SET-UP IN THE BREAKOUT ROOM: A = examiner (reads the left column ONLY — the questions, in order), B = candidate (sees the task column; Core may use the help column), C = observer (ticks the feedback checklist). 1 minute preparation, about 3 minutes speaking, 1 minute feedback, then rotate.
 Task ! is the unexpected question: in the exam the candidate has not seen it — the examiner should read it without warning.
@@ -1243,7 +1251,11 @@
           <a:lstStyle/>
           <a:p>
             <a:r>
-              <a:rPr lang="en-US" dirty="0"/>
+              <a:rPr lang="ar-SA" dirty="0">
+                <a:latin typeface="Amiri" pitchFamily="2" charset="-78"/>
+                <a:ea typeface="Amiri" pitchFamily="2" charset="-78"/>
+                <a:cs typeface="Amiri" pitchFamily="2" charset="-78"/>
+              </a:rPr>
               <a:t>TOPIC CONVERSATION — Core. Examiner asks the questions in order and may add “لِمَاذَا؟ / هَلْ يُمْكِنُ أَنْ تَشْرَحَ أَكْثَرَ؟” to push for more. Candidate aims for one full sentence per question.
 </a:t>
             </a:r>
@@ -1332,7 +1344,11 @@
           <a:lstStyle/>
           <a:p>
             <a:r>
-              <a:rPr lang="en-US" dirty="0"/>
+              <a:rPr lang="ar-SA" dirty="0">
+                <a:latin typeface="Amiri" pitchFamily="2" charset="-78"/>
+                <a:ea typeface="Amiri" pitchFamily="2" charset="-78"/>
+                <a:cs typeface="Amiri" pitchFamily="2" charset="-78"/>
+              </a:rPr>
               <a:t>TOPIC CONVERSATION — Develop. Examiner asks the questions in order and may add “لِمَاذَا؟ / هَلْ يُمْكِنُ أَنْ تَشْرَحَ أَكْثَرَ؟” to push for more. Candidate aims for two or three sentences, with a comparison and a past or future detail.
 </a:t>
             </a:r>
@@ -1421,7 +1437,11 @@
           <a:lstStyle/>
           <a:p>
             <a:r>
-              <a:rPr lang="en-US" dirty="0"/>
+              <a:rPr lang="ar-SA" dirty="0">
+                <a:latin typeface="Amiri" pitchFamily="2" charset="-78"/>
+                <a:ea typeface="Amiri" pitchFamily="2" charset="-78"/>
+                <a:cs typeface="Amiri" pitchFamily="2" charset="-78"/>
+              </a:rPr>
               <a:t>TOPIC CONVERSATION — Stretch. Examiner asks the questions in order and may add “لِمَاذَا؟ / هَلْ يُمْكِنُ أَنْ تَشْرَحَ أَكْثَرَ؟” to push for more. Candidate aims for a developed answer: opinion, balance, concession and a conditional.
 </a:t>
             </a:r>
@@ -1510,7 +1530,11 @@
           <a:lstStyle/>
           <a:p>
             <a:r>
-              <a:rPr lang="en-US" dirty="0"/>
+              <a:rPr lang="ar-SA" dirty="0">
+                <a:latin typeface="Amiri" pitchFamily="2" charset="-78"/>
+                <a:ea typeface="Amiri" pitchFamily="2" charset="-78"/>
+                <a:cs typeface="Amiri" pitchFamily="2" charset="-78"/>
+              </a:rPr>
               <a:t>WELCOME (1 min) — while students join.
 • Greet each student by name as they arrive: السَّلَامُ عَلَيْكُمْ. Take the register (Pastoral Tracker: attendance 0/1).
 • 2-MINUTE CHECK-IN (SEND training): a private chat to any student who seemed unsettled last lesson — “Are you okay today? 👍 / 👎”.
@@ -2224,7 +2248,11 @@
           <a:lstStyle/>
           <a:p>
             <a:r>
-              <a:rPr lang="en-US" dirty="0"/>
+              <a:rPr lang="ar-SA" dirty="0">
+                <a:latin typeface="Amiri" pitchFamily="2" charset="-78"/>
+                <a:ea typeface="Amiri" pitchFamily="2" charset="-78"/>
+                <a:cs typeface="Amiri" pitchFamily="2" charset="-78"/>
+              </a:rPr>
               <a:t>TEACH (3 min). Role play = precise and complete; conversation = develop. Choral repetition of the repair phrases. To a girl: تُعِيدِي.</a:t>
             </a:r>
             <a:endParaRPr lang="en-US" dirty="0"/>
@@ -2312,7 +2340,11 @@
           <a:lstStyle/>
           <a:p>
             <a:r>
-              <a:rPr lang="en-US" dirty="0"/>
+              <a:rPr lang="ar-SA" dirty="0">
+                <a:latin typeface="Amiri" pitchFamily="2" charset="-78"/>
+                <a:ea typeface="Amiri" pitchFamily="2" charset="-78"/>
+                <a:cs typeface="Amiri" pitchFamily="2" charset="-78"/>
+              </a:rPr>
               <a:t>LANGUAGE BANK (2 min) — a revision map of Topic B. EXAM TIP: agreement errors are the most common slip — check every adjective: a girl is طَوِيلَةٌ; a red bag is حَقِيبَةٌ حَمْرَاءُ; rooms are غُرَفٌ وَاسِعَةٌ (non-human plural → feminine singular).</a:t>
             </a:r>
             <a:endParaRPr lang="en-US" dirty="0"/>
@@ -2400,7 +2432,11 @@
           <a:lstStyle/>
           <a:p>
             <a:r>
-              <a:rPr lang="en-US" dirty="0"/>
+              <a:rPr lang="ar-SA" dirty="0">
+                <a:latin typeface="Amiri" pitchFamily="2" charset="-78"/>
+                <a:ea typeface="Amiri" pitchFamily="2" charset="-78"/>
+                <a:cs typeface="Amiri" pitchFamily="2" charset="-78"/>
+              </a:rPr>
               <a:t>LANGUAGE BANK (2 min) — lift a description with a comparison (أَكْبَرُ مِنْ), a past experience (قَضَيْتُ … وَكَانَ …) and an opinion with a reason. EXAM TIP: when the card says ASK, start with a question word: مَتَى · أَيْنَ · كَمْ · هَلْ.</a:t>
             </a:r>
             <a:endParaRPr lang="en-US" dirty="0"/>
@@ -2576,7 +2612,11 @@
           <a:lstStyle/>
           <a:p>
             <a:r>
-              <a:rPr lang="en-US" dirty="0"/>
+              <a:rPr lang="ar-SA" dirty="0">
+                <a:latin typeface="Amiri" pitchFamily="2" charset="-78"/>
+                <a:ea typeface="Amiri" pitchFamily="2" charset="-78"/>
+                <a:cs typeface="Amiri" pitchFamily="2" charset="-78"/>
+              </a:rPr>
               <a:t>ROLE PLAY A (Core) — a clothes shop.
 SET-UP IN THE BREAKOUT ROOM: A = examiner (reads the left column ONLY — the questions, in order), B = candidate (sees the task column; Core may use the help column), C = observer (ticks the feedback checklist). 1 minute preparation, about 3 minutes speaking, 1 minute feedback, then rotate.
 Task ! is the unexpected question: in the exam the candidate has not seen it — the examiner should read it without warning.
@@ -2668,7 +2708,11 @@
           <a:lstStyle/>
           <a:p>
             <a:r>
-              <a:rPr lang="en-US" dirty="0"/>
+              <a:rPr lang="ar-SA" dirty="0">
+                <a:latin typeface="Amiri" pitchFamily="2" charset="-78"/>
+                <a:ea typeface="Amiri" pitchFamily="2" charset="-78"/>
+                <a:cs typeface="Amiri" pitchFamily="2" charset="-78"/>
+              </a:rPr>
               <a:t>ROLE PLAY B (Core+) — a phone call.
 SET-UP IN THE BREAKOUT ROOM: A = examiner (reads the left column ONLY — the questions, in order), B = candidate (sees the task column; Core may use the help column), C = observer (ticks the feedback checklist). 1 minute preparation, about 3 minutes speaking, 1 minute feedback, then rotate.
 Task ! is the unexpected question: in the exam the candidate has not seen it — the examiner should read it without warning.
@@ -3156,6 +3200,7 @@
                   <a:srgbClr val="D4AF37"/>
                 </a:solidFill>
                 <a:latin typeface="Amiri" pitchFamily="2" charset="-78"/>
+                <a:ea typeface="Amiri" pitchFamily="2" charset="-78"/>
                 <a:cs typeface="Amiri" pitchFamily="2" charset="-78"/>
               </a:rPr>
               <a:t>م</a:t>
@@ -3362,6 +3407,7 @@
                   <a:srgbClr val="D4AF37"/>
                 </a:solidFill>
                 <a:latin typeface="Amiri" pitchFamily="2" charset="-78"/>
+                <a:ea typeface="Amiri" pitchFamily="2" charset="-78"/>
                 <a:cs typeface="Amiri" pitchFamily="2" charset="-78"/>
               </a:rPr>
               <a:t>وَرْشَةُ التَّحَدُّثِ — النَّاسُ وَالبَيْتُ وَوَقْتُ الفَرَاغِ</a:t>
@@ -3413,6 +3459,7 @@
                   <a:srgbClr val="C6D2E6"/>
                 </a:solidFill>
                 <a:latin typeface="Amiri" pitchFamily="2" charset="-78"/>
+                <a:ea typeface="Amiri" pitchFamily="2" charset="-78"/>
                 <a:cs typeface="Amiri" pitchFamily="2" charset="-78"/>
               </a:rPr>
               <a:t>طَوِيلٌ / طَوِيلَةٌ</a:t>
@@ -3439,6 +3486,7 @@
                   <a:srgbClr val="C6D2E6"/>
                 </a:solidFill>
                 <a:latin typeface="Amiri" pitchFamily="2" charset="-78"/>
+                <a:ea typeface="Amiri" pitchFamily="2" charset="-78"/>
                 <a:cs typeface="Amiri" pitchFamily="2" charset="-78"/>
               </a:rPr>
               <a:t>غُرَفٌ وَاسِعَةٌ</a:t>
@@ -3871,6 +3919,7 @@
                   <a:srgbClr val="D4AF37"/>
                 </a:solidFill>
                 <a:latin typeface="Amiri" pitchFamily="2" charset="-78"/>
+                <a:ea typeface="Amiri" pitchFamily="2" charset="-78"/>
                 <a:cs typeface="Amiri" pitchFamily="2" charset="-78"/>
               </a:rPr>
               <a:t>م</a:t>
@@ -4191,6 +4240,7 @@
                   <a:srgbClr val="8A6D1E"/>
                 </a:solidFill>
                 <a:latin typeface="Amiri" pitchFamily="2" charset="-78"/>
+                <a:ea typeface="Amiri" pitchFamily="2" charset="-78"/>
                 <a:cs typeface="Amiri" pitchFamily="2" charset="-78"/>
               </a:rPr>
               <a:t>عَائِلَتِي وَأَصْدِقَائِي وَبَيْتِي</a:t>
@@ -4471,6 +4521,7 @@
                   <a:srgbClr val="1B3B6F"/>
                 </a:solidFill>
                 <a:latin typeface="Amiri" pitchFamily="2" charset="-78"/>
+                <a:ea typeface="Amiri" pitchFamily="2" charset="-78"/>
                 <a:cs typeface="Amiri" pitchFamily="2" charset="-78"/>
               </a:rPr>
               <a:t>عِنْدِي … ؛ أُخْتِي … أَمَّا أَخِي فَمَرِحٌ …</a:t>
@@ -4547,6 +4598,7 @@
                   <a:srgbClr val="1B3B6F"/>
                 </a:solidFill>
                 <a:latin typeface="Amiri" pitchFamily="2" charset="-78"/>
+                <a:ea typeface="Amiri" pitchFamily="2" charset="-78"/>
                 <a:cs typeface="Amiri" pitchFamily="2" charset="-78"/>
               </a:rPr>
               <a:t>حَدِّثِينِي عَنْ عَائِلَتِكِ.</a:t>
@@ -4650,6 +4702,7 @@
                   <a:srgbClr val="1B3B6F"/>
                 </a:solidFill>
                 <a:latin typeface="Amiri" pitchFamily="2" charset="-78"/>
+                <a:ea typeface="Amiri" pitchFamily="2" charset="-78"/>
                 <a:cs typeface="Amiri" pitchFamily="2" charset="-78"/>
               </a:rPr>
               <a:t>أَعَزُّ صَدِيقَاتِي … ؛ هِيَ أَطْوَلُ مِنِّي …</a:t>
@@ -4726,6 +4779,7 @@
                   <a:srgbClr val="1B3B6F"/>
                 </a:solidFill>
                 <a:latin typeface="Amiri" pitchFamily="2" charset="-78"/>
+                <a:ea typeface="Amiri" pitchFamily="2" charset="-78"/>
                 <a:cs typeface="Amiri" pitchFamily="2" charset="-78"/>
               </a:rPr>
               <a:t>وَمَنْ أَعَزُّ صَدِيقَاتِكِ؟</a:t>
@@ -4829,6 +4883,7 @@
                   <a:srgbClr val="1B3B6F"/>
                 </a:solidFill>
                 <a:latin typeface="Amiri" pitchFamily="2" charset="-78"/>
+                <a:ea typeface="Amiri" pitchFamily="2" charset="-78"/>
                 <a:cs typeface="Amiri" pitchFamily="2" charset="-78"/>
               </a:rPr>
               <a:t>غُرْفَتِي … ؛ فِيهَا … بِجَانِبِ …</a:t>
@@ -4905,6 +4960,7 @@
                   <a:srgbClr val="1B3B6F"/>
                 </a:solidFill>
                 <a:latin typeface="Amiri" pitchFamily="2" charset="-78"/>
+                <a:ea typeface="Amiri" pitchFamily="2" charset="-78"/>
                 <a:cs typeface="Amiri" pitchFamily="2" charset="-78"/>
               </a:rPr>
               <a:t>صِفِي لِي غُرْفَتَكِ.</a:t>
@@ -5008,6 +5064,7 @@
                   <a:srgbClr val="1B3B6F"/>
                 </a:solidFill>
                 <a:latin typeface="Amiri" pitchFamily="2" charset="-78"/>
+                <a:ea typeface="Amiri" pitchFamily="2" charset="-78"/>
                 <a:cs typeface="Amiri" pitchFamily="2" charset="-78"/>
               </a:rPr>
               <a:t>أَرْسُمُ … مَرَّتَيْنِ فِي الأُسْبُوعِ، لِأَنَّ …</a:t>
@@ -5084,6 +5141,7 @@
                   <a:srgbClr val="1B3B6F"/>
                 </a:solidFill>
                 <a:latin typeface="Amiri" pitchFamily="2" charset="-78"/>
+                <a:ea typeface="Amiri" pitchFamily="2" charset="-78"/>
                 <a:cs typeface="Amiri" pitchFamily="2" charset="-78"/>
               </a:rPr>
               <a:t>مَاذَا تَفْعَلِينَ فِي وَقْتِ فَرَاغِكِ؟</a:t>
@@ -5187,6 +5245,7 @@
                   <a:srgbClr val="1B3B6F"/>
                 </a:solidFill>
                 <a:latin typeface="Amiri" pitchFamily="2" charset="-78"/>
+                <a:ea typeface="Amiri" pitchFamily="2" charset="-78"/>
                 <a:cs typeface="Amiri" pitchFamily="2" charset="-78"/>
               </a:rPr>
               <a:t>قَضَيْتُهَا فِي … ؛ أَقَمْنَا … وَ…</a:t>
@@ -5263,6 +5322,7 @@
                   <a:srgbClr val="1B3B6F"/>
                 </a:solidFill>
                 <a:latin typeface="Amiri" pitchFamily="2" charset="-78"/>
+                <a:ea typeface="Amiri" pitchFamily="2" charset="-78"/>
                 <a:cs typeface="Amiri" pitchFamily="2" charset="-78"/>
               </a:rPr>
               <a:t>أَيْنَ قَضَيْتِ العُطْلَةَ الصَّيْفِيَّةَ؟</a:t>
@@ -5472,6 +5532,7 @@
                   <a:srgbClr val="D4AF37"/>
                 </a:solidFill>
                 <a:latin typeface="Amiri" pitchFamily="2" charset="-78"/>
+                <a:ea typeface="Amiri" pitchFamily="2" charset="-78"/>
                 <a:cs typeface="Amiri" pitchFamily="2" charset="-78"/>
               </a:rPr>
               <a:t>م</a:t>
@@ -5792,6 +5853,7 @@
                   <a:srgbClr val="8A6D1E"/>
                 </a:solidFill>
                 <a:latin typeface="Amiri" pitchFamily="2" charset="-78"/>
+                <a:ea typeface="Amiri" pitchFamily="2" charset="-78"/>
                 <a:cs typeface="Amiri" pitchFamily="2" charset="-78"/>
               </a:rPr>
               <a:t>الصَّدَاقَةُ فِي عَصْرِ الشَّاشَاتِ</a:t>
@@ -6072,6 +6134,7 @@
                   <a:srgbClr val="1B3B6F"/>
                 </a:solidFill>
                 <a:latin typeface="Amiri" pitchFamily="2" charset="-78"/>
+                <a:ea typeface="Amiri" pitchFamily="2" charset="-78"/>
                 <a:cs typeface="Amiri" pitchFamily="2" charset="-78"/>
               </a:rPr>
               <a:t>مِنْ نَاحِيَةٍ … وَمِنْ نَاحِيَةٍ أُخْرَى …</a:t>
@@ -6148,6 +6211,7 @@
                   <a:srgbClr val="1B3B6F"/>
                 </a:solidFill>
                 <a:latin typeface="Amiri" pitchFamily="2" charset="-78"/>
+                <a:ea typeface="Amiri" pitchFamily="2" charset="-78"/>
                 <a:cs typeface="Amiri" pitchFamily="2" charset="-78"/>
               </a:rPr>
               <a:t>هَلْ تَكْفِي صَدَاقَاتُ الإِنْتَرْنِتِ؟</a:t>
@@ -6251,6 +6315,7 @@
                   <a:srgbClr val="1B3B6F"/>
                 </a:solidFill>
                 <a:latin typeface="Amiri" pitchFamily="2" charset="-78"/>
+                <a:ea typeface="Amiri" pitchFamily="2" charset="-78"/>
                 <a:cs typeface="Amiri" pitchFamily="2" charset="-78"/>
               </a:rPr>
               <a:t>الصَّدِيقُ الحَقِيقِيُّ هُوَ الَّذِي …</a:t>
@@ -6327,6 +6392,7 @@
                   <a:srgbClr val="1B3B6F"/>
                 </a:solidFill>
                 <a:latin typeface="Amiri" pitchFamily="2" charset="-78"/>
+                <a:ea typeface="Amiri" pitchFamily="2" charset="-78"/>
                 <a:cs typeface="Amiri" pitchFamily="2" charset="-78"/>
               </a:rPr>
               <a:t>مَا صِفَاتُ الصَّدِيقِ الحَقِيقِيِّ فِي رَأْيِكِ؟</a:t>
@@ -6430,6 +6496,7 @@
                   <a:srgbClr val="1B3B6F"/>
                 </a:solidFill>
                 <a:latin typeface="Amiri" pitchFamily="2" charset="-78"/>
+                <a:ea typeface="Amiri" pitchFamily="2" charset="-78"/>
                 <a:cs typeface="Amiri" pitchFamily="2" charset="-78"/>
               </a:rPr>
               <a:t>عِنْدَمَا … كَانَ … فَعَرَفْتُ …</a:t>
@@ -6506,6 +6573,7 @@
                   <a:srgbClr val="1B3B6F"/>
                 </a:solidFill>
                 <a:latin typeface="Amiri" pitchFamily="2" charset="-78"/>
+                <a:ea typeface="Amiri" pitchFamily="2" charset="-78"/>
                 <a:cs typeface="Amiri" pitchFamily="2" charset="-78"/>
               </a:rPr>
               <a:t>هَلْ عِشْتِ تَجْرِبَةً تُثْبِتُ ذٰلِكَ؟</a:t>
@@ -6609,6 +6677,7 @@
                   <a:srgbClr val="1B3B6F"/>
                 </a:solidFill>
                 <a:latin typeface="Amiri" pitchFamily="2" charset="-78"/>
+                <a:ea typeface="Amiri" pitchFamily="2" charset="-78"/>
                 <a:cs typeface="Amiri" pitchFamily="2" charset="-78"/>
               </a:rPr>
               <a:t>صَحِيحٌ أَنَّ … غَيْرَ أَنَّ … ؛ لِذٰلِكَ …</a:t>
@@ -6685,6 +6754,7 @@
                   <a:srgbClr val="1B3B6F"/>
                 </a:solidFill>
                 <a:latin typeface="Amiri" pitchFamily="2" charset="-78"/>
+                <a:ea typeface="Amiri" pitchFamily="2" charset="-78"/>
                 <a:cs typeface="Amiri" pitchFamily="2" charset="-78"/>
               </a:rPr>
               <a:t>لٰكِنَّ الشَّبَابَ يُفَضِّلُونَ الهَاتِفَ عَلَى اللِّقَاءِ.</a:t>
@@ -6788,6 +6858,7 @@
                   <a:srgbClr val="1B3B6F"/>
                 </a:solidFill>
                 <a:latin typeface="Amiri" pitchFamily="2" charset="-78"/>
+                <a:ea typeface="Amiri" pitchFamily="2" charset="-78"/>
                 <a:cs typeface="Amiri" pitchFamily="2" charset="-78"/>
               </a:rPr>
               <a:t>لَوِ اسْتَطَعْتُ، لَذَهَبْنَا …</a:t>
@@ -6867,6 +6938,7 @@
                   <a:srgbClr val="1B3B6F"/>
                 </a:solidFill>
                 <a:latin typeface="Amiri" pitchFamily="2" charset="-78"/>
+                <a:ea typeface="Amiri" pitchFamily="2" charset="-78"/>
                 <a:cs typeface="Amiri" pitchFamily="2" charset="-78"/>
               </a:rPr>
               <a:t>لَوِ اسْتَطَعْتِ أَنْ تَقْضِيَ يَوْمًا كَامِلًا مَعَ صَدِيقَتِكِ، مَاذَا تَفْعَلَانِ؟</a:t>
@@ -7076,6 +7148,7 @@
                   <a:srgbClr val="D4AF37"/>
                 </a:solidFill>
                 <a:latin typeface="Amiri" pitchFamily="2" charset="-78"/>
+                <a:ea typeface="Amiri" pitchFamily="2" charset="-78"/>
                 <a:cs typeface="Amiri" pitchFamily="2" charset="-78"/>
               </a:rPr>
               <a:t>م</a:t>
@@ -7396,6 +7469,7 @@
                   <a:srgbClr val="8A6D1E"/>
                 </a:solidFill>
                 <a:latin typeface="Amiri" pitchFamily="2" charset="-78"/>
+                <a:ea typeface="Amiri" pitchFamily="2" charset="-78"/>
                 <a:cs typeface="Amiri" pitchFamily="2" charset="-78"/>
               </a:rPr>
               <a:t>وَرَقَةُ المُلَاحِظِ</a:t>
@@ -8866,6 +8940,7 @@
                   <a:srgbClr val="D4AF37"/>
                 </a:solidFill>
                 <a:latin typeface="Amiri" pitchFamily="2" charset="-78"/>
+                <a:ea typeface="Amiri" pitchFamily="2" charset="-78"/>
                 <a:cs typeface="Amiri" pitchFamily="2" charset="-78"/>
               </a:rPr>
               <a:t>م</a:t>
@@ -9186,6 +9261,7 @@
                   <a:srgbClr val="8A6D1E"/>
                 </a:solidFill>
                 <a:latin typeface="Amiri" pitchFamily="2" charset="-78"/>
+                <a:ea typeface="Amiri" pitchFamily="2" charset="-78"/>
                 <a:cs typeface="Amiri" pitchFamily="2" charset="-78"/>
               </a:rPr>
               <a:t>نَمُوذَجُ الإِجَابَةِ</a:t>
@@ -9428,6 +9504,7 @@
                   <a:srgbClr val="1B3B6F"/>
                 </a:solidFill>
                 <a:latin typeface="Amiri" pitchFamily="2" charset="-78"/>
+                <a:ea typeface="Amiri" pitchFamily="2" charset="-78"/>
                 <a:cs typeface="Amiri" pitchFamily="2" charset="-78"/>
               </a:rPr>
               <a:t>أُرِيدُ سُتْرَةً لِلشِّتَاءِ، مِنْ فَضْلِكِ.</a:t>
@@ -9504,6 +9581,7 @@
                   <a:srgbClr val="1B3B6F"/>
                 </a:solidFill>
                 <a:latin typeface="Amiri" pitchFamily="2" charset="-78"/>
+                <a:ea typeface="Amiri" pitchFamily="2" charset="-78"/>
                 <a:cs typeface="Amiri" pitchFamily="2" charset="-78"/>
               </a:rPr>
               <a:t>أَهْلًا! كَيْفَ أُسَاعِدُكِ؟</a:t>
@@ -9607,6 +9685,7 @@
                   <a:srgbClr val="1B3B6F"/>
                 </a:solidFill>
                 <a:latin typeface="Amiri" pitchFamily="2" charset="-78"/>
+                <a:ea typeface="Amiri" pitchFamily="2" charset="-78"/>
                 <a:cs typeface="Amiri" pitchFamily="2" charset="-78"/>
               </a:rPr>
               <a:t>أُفَضِّلُ سُتْرَةً زَرْقَاءَ.</a:t>
@@ -9683,6 +9762,7 @@
                   <a:srgbClr val="1B3B6F"/>
                 </a:solidFill>
                 <a:latin typeface="Amiri" pitchFamily="2" charset="-78"/>
+                <a:ea typeface="Amiri" pitchFamily="2" charset="-78"/>
                 <a:cs typeface="Amiri" pitchFamily="2" charset="-78"/>
               </a:rPr>
               <a:t>أَيَّ لَوْنٍ تُفَضِّلِينَ؟</a:t>
@@ -9786,6 +9866,7 @@
                   <a:srgbClr val="1B3B6F"/>
                 </a:solidFill>
                 <a:latin typeface="Amiri" pitchFamily="2" charset="-78"/>
+                <a:ea typeface="Amiri" pitchFamily="2" charset="-78"/>
                 <a:cs typeface="Amiri" pitchFamily="2" charset="-78"/>
               </a:rPr>
               <a:t>مَقَاسِي مُتَوَسِّطٌ.</a:t>
@@ -9862,6 +9943,7 @@
                   <a:srgbClr val="1B3B6F"/>
                 </a:solidFill>
                 <a:latin typeface="Amiri" pitchFamily="2" charset="-78"/>
+                <a:ea typeface="Amiri" pitchFamily="2" charset="-78"/>
                 <a:cs typeface="Amiri" pitchFamily="2" charset="-78"/>
               </a:rPr>
               <a:t>مَا مَقَاسُكِ؟</a:t>
@@ -9965,6 +10047,7 @@
                   <a:srgbClr val="1B3B6F"/>
                 </a:solidFill>
                 <a:latin typeface="Amiri" pitchFamily="2" charset="-78"/>
+                <a:ea typeface="Amiri" pitchFamily="2" charset="-78"/>
                 <a:cs typeface="Amiri" pitchFamily="2" charset="-78"/>
               </a:rPr>
               <a:t>كَمْ ثَمَنُهَا؟</a:t>
@@ -10041,6 +10124,7 @@
                   <a:srgbClr val="1B3B6F"/>
                 </a:solidFill>
                 <a:latin typeface="Amiri" pitchFamily="2" charset="-78"/>
+                <a:ea typeface="Amiri" pitchFamily="2" charset="-78"/>
                 <a:cs typeface="Amiri" pitchFamily="2" charset="-78"/>
               </a:rPr>
               <a:t>تَفَضَّلِي، هٰذِهِ جَمِيلَةٌ.</a:t>
@@ -10144,6 +10228,7 @@
                   <a:srgbClr val="1B3B6F"/>
                 </a:solidFill>
                 <a:latin typeface="Amiri" pitchFamily="2" charset="-78"/>
+                <a:ea typeface="Amiri" pitchFamily="2" charset="-78"/>
                 <a:cs typeface="Amiri" pitchFamily="2" charset="-78"/>
               </a:rPr>
               <a:t>لِأَنِّي سَأُسَافِرُ إِلَى اسْكُتْلَنْدَا فِي العُطْلَةِ.</a:t>
@@ -10220,6 +10305,7 @@
                   <a:srgbClr val="1B3B6F"/>
                 </a:solidFill>
                 <a:latin typeface="Amiri" pitchFamily="2" charset="-78"/>
+                <a:ea typeface="Amiri" pitchFamily="2" charset="-78"/>
                 <a:cs typeface="Amiri" pitchFamily="2" charset="-78"/>
               </a:rPr>
               <a:t>أَرْبَعُونَ جُنَيْهًا. لِأَيِّ مُنَاسَبَةٍ تَشْتَرِينَهَا؟</a:t>
@@ -10429,6 +10515,7 @@
                   <a:srgbClr val="D4AF37"/>
                 </a:solidFill>
                 <a:latin typeface="Amiri" pitchFamily="2" charset="-78"/>
+                <a:ea typeface="Amiri" pitchFamily="2" charset="-78"/>
                 <a:cs typeface="Amiri" pitchFamily="2" charset="-78"/>
               </a:rPr>
               <a:t>م</a:t>
@@ -10749,6 +10836,7 @@
                   <a:srgbClr val="8A6D1E"/>
                 </a:solidFill>
                 <a:latin typeface="Amiri" pitchFamily="2" charset="-78"/>
+                <a:ea typeface="Amiri" pitchFamily="2" charset="-78"/>
                 <a:cs typeface="Amiri" pitchFamily="2" charset="-78"/>
               </a:rPr>
               <a:t>نَمُوذَجُ الإِجَابَةِ</a:t>
@@ -10991,6 +11079,7 @@
                   <a:srgbClr val="1B3B6F"/>
                 </a:solidFill>
                 <a:latin typeface="Amiri" pitchFamily="2" charset="-78"/>
+                <a:ea typeface="Amiri" pitchFamily="2" charset="-78"/>
                 <a:cs typeface="Amiri" pitchFamily="2" charset="-78"/>
               </a:rPr>
               <a:t>مَرْحَبًا! هَلْ تُرِيدِينَ أَنْ تَأْتِيَ إِلَى حَفْلَةِ عِيدِ مِيلَادِي يَوْمَ السَّبْتِ؟</a:t>
@@ -11067,6 +11156,7 @@
                   <a:srgbClr val="1B3B6F"/>
                 </a:solidFill>
                 <a:latin typeface="Amiri" pitchFamily="2" charset="-78"/>
+                <a:ea typeface="Amiri" pitchFamily="2" charset="-78"/>
                 <a:cs typeface="Amiri" pitchFamily="2" charset="-78"/>
               </a:rPr>
               <a:t>أَلُو، مَرْحَبًا!</a:t>
@@ -11170,6 +11260,7 @@
                   <a:srgbClr val="1B3B6F"/>
                 </a:solidFill>
                 <a:latin typeface="Amiri" pitchFamily="2" charset="-78"/>
+                <a:ea typeface="Amiri" pitchFamily="2" charset="-78"/>
                 <a:cs typeface="Amiri" pitchFamily="2" charset="-78"/>
               </a:rPr>
               <a:t>فِي السَّاعَةِ الرَّابِعَةِ، فِي حَدِيقَةِ بَيْتِنَا.</a:t>
@@ -11246,6 +11337,7 @@
                   <a:srgbClr val="1B3B6F"/>
                 </a:solidFill>
                 <a:latin typeface="Amiri" pitchFamily="2" charset="-78"/>
+                <a:ea typeface="Amiri" pitchFamily="2" charset="-78"/>
                 <a:cs typeface="Amiri" pitchFamily="2" charset="-78"/>
               </a:rPr>
               <a:t>بِكُلِّ سُرُورٍ! فِي أَيِّ سَاعَةٍ؟</a:t>
@@ -11349,6 +11441,7 @@
                   <a:srgbClr val="1B3B6F"/>
                 </a:solidFill>
                 <a:latin typeface="Amiri" pitchFamily="2" charset="-78"/>
+                <a:ea typeface="Amiri" pitchFamily="2" charset="-78"/>
                 <a:cs typeface="Amiri" pitchFamily="2" charset="-78"/>
               </a:rPr>
               <a:t>سَنَأْكُلُ البِيتْزَا وَالكَعْكَةَ، ثُمَّ سَنَلْعَبُ أَلْعَابًا فِي الحَدِيقَةِ.</a:t>
@@ -11425,6 +11518,7 @@
                   <a:srgbClr val="1B3B6F"/>
                 </a:solidFill>
                 <a:latin typeface="Amiri" pitchFamily="2" charset="-78"/>
+                <a:ea typeface="Amiri" pitchFamily="2" charset="-78"/>
                 <a:cs typeface="Amiri" pitchFamily="2" charset="-78"/>
               </a:rPr>
               <a:t>مَاذَا سَنَفْعَلُ؟</a:t>
@@ -11528,6 +11622,7 @@
                   <a:srgbClr val="1B3B6F"/>
                 </a:solidFill>
                 <a:latin typeface="Amiri" pitchFamily="2" charset="-78"/>
+                <a:ea typeface="Amiri" pitchFamily="2" charset="-78"/>
                 <a:cs typeface="Amiri" pitchFamily="2" charset="-78"/>
               </a:rPr>
               <a:t>الْبَسِي مَلَابِسَ مُرِيحَةً. وَهَلْ تَسْتَطِيعِينَ أَنْ تُحْضِرِي أُخْتَكِ أَيْضًا؟</a:t>
@@ -11604,6 +11699,7 @@
                   <a:srgbClr val="1B3B6F"/>
                 </a:solidFill>
                 <a:latin typeface="Amiri" pitchFamily="2" charset="-78"/>
+                <a:ea typeface="Amiri" pitchFamily="2" charset="-78"/>
                 <a:cs typeface="Amiri" pitchFamily="2" charset="-78"/>
               </a:rPr>
               <a:t>رَائِعٌ! مَاذَا أَلْبَسُ؟</a:t>
@@ -11707,6 +11803,7 @@
                   <a:srgbClr val="1B3B6F"/>
                 </a:solidFill>
                 <a:latin typeface="Amiri" pitchFamily="2" charset="-78"/>
+                <a:ea typeface="Amiri" pitchFamily="2" charset="-78"/>
                 <a:cs typeface="Amiri" pitchFamily="2" charset="-78"/>
               </a:rPr>
               <a:t>ذَهَبْتُ مَعَ أُسْرَتِي إِلَى مَطْعَمٍ تُرْكِيٍّ، وَكَانَ الطَّعَامُ لَذِيذًا جِدًّا.</a:t>
@@ -11783,6 +11880,7 @@
                   <a:srgbClr val="1B3B6F"/>
                 </a:solidFill>
                 <a:latin typeface="Amiri" pitchFamily="2" charset="-78"/>
+                <a:ea typeface="Amiri" pitchFamily="2" charset="-78"/>
                 <a:cs typeface="Amiri" pitchFamily="2" charset="-78"/>
               </a:rPr>
               <a:t>طَبْعًا. مَاذَا فَعَلْتِ فِي عِيدِ مِيلَادِكِ المَاضِي؟</a:t>
@@ -11992,6 +12090,7 @@
                   <a:srgbClr val="D4AF37"/>
                 </a:solidFill>
                 <a:latin typeface="Amiri" pitchFamily="2" charset="-78"/>
+                <a:ea typeface="Amiri" pitchFamily="2" charset="-78"/>
                 <a:cs typeface="Amiri" pitchFamily="2" charset="-78"/>
               </a:rPr>
               <a:t>م</a:t>
@@ -12312,6 +12411,7 @@
                   <a:srgbClr val="8A6D1E"/>
                 </a:solidFill>
                 <a:latin typeface="Amiri" pitchFamily="2" charset="-78"/>
+                <a:ea typeface="Amiri" pitchFamily="2" charset="-78"/>
                 <a:cs typeface="Amiri" pitchFamily="2" charset="-78"/>
               </a:rPr>
               <a:t>نَمُوذَجُ الإِجَابَةِ</a:t>
@@ -12554,6 +12654,7 @@
                   <a:srgbClr val="1B3B6F"/>
                 </a:solidFill>
                 <a:latin typeface="Amiri" pitchFamily="2" charset="-78"/>
+                <a:ea typeface="Amiri" pitchFamily="2" charset="-78"/>
                 <a:cs typeface="Amiri" pitchFamily="2" charset="-78"/>
               </a:rPr>
               <a:t>عِنْدِي أُخْتٌ وَأَخَوَانِ؛ أُخْتِي طَوِيلَةٌ وَهَادِئَةٌ، أَمَّا أَخِي الصَّغِيرُ فَمَرِحٌ لٰكِنَّهُ مُزْعِجٌ أَحْيَانًا!</a:t>
@@ -12630,6 +12731,7 @@
                   <a:srgbClr val="1B3B6F"/>
                 </a:solidFill>
                 <a:latin typeface="Amiri" pitchFamily="2" charset="-78"/>
+                <a:ea typeface="Amiri" pitchFamily="2" charset="-78"/>
                 <a:cs typeface="Amiri" pitchFamily="2" charset="-78"/>
               </a:rPr>
               <a:t>حَدِّثِينِي عَنْ عَائِلَتِكِ.</a:t>
@@ -12733,6 +12835,7 @@
                   <a:srgbClr val="1B3B6F"/>
                 </a:solidFill>
                 <a:latin typeface="Amiri" pitchFamily="2" charset="-78"/>
+                <a:ea typeface="Amiri" pitchFamily="2" charset="-78"/>
                 <a:cs typeface="Amiri" pitchFamily="2" charset="-78"/>
               </a:rPr>
               <a:t>أَعَزُّ صَدِيقَاتِي اسْمُهَا جُودِي؛ هِيَ أَطْوَلُ مِنِّي، وَشَعْرُهَا أَسْوَدُ، وَهِيَ صَادِقَةٌ وَتَسْمَعُنِي دَائِمًا.</a:t>
@@ -12809,6 +12912,7 @@
                   <a:srgbClr val="1B3B6F"/>
                 </a:solidFill>
                 <a:latin typeface="Amiri" pitchFamily="2" charset="-78"/>
+                <a:ea typeface="Amiri" pitchFamily="2" charset="-78"/>
                 <a:cs typeface="Amiri" pitchFamily="2" charset="-78"/>
               </a:rPr>
               <a:t>وَمَنْ أَعَزُّ صَدِيقَاتِكِ؟</a:t>
@@ -12912,6 +13016,7 @@
                   <a:srgbClr val="1B3B6F"/>
                 </a:solidFill>
                 <a:latin typeface="Amiri" pitchFamily="2" charset="-78"/>
+                <a:ea typeface="Amiri" pitchFamily="2" charset="-78"/>
                 <a:cs typeface="Amiri" pitchFamily="2" charset="-78"/>
               </a:rPr>
               <a:t>غُرْفَتِي صَغِيرَةٌ لٰكِنَّهَا مُرَتَّبَةٌ؛ فِيهَا سَرِيرٌ أَبْيَضُ بِجَانِبِ النَّافِذَةِ، وَمَكْتَبٌ تَحْتَ رُفُوفِ الكُتُبِ.</a:t>
@@ -12988,6 +13093,7 @@
                   <a:srgbClr val="1B3B6F"/>
                 </a:solidFill>
                 <a:latin typeface="Amiri" pitchFamily="2" charset="-78"/>
+                <a:ea typeface="Amiri" pitchFamily="2" charset="-78"/>
                 <a:cs typeface="Amiri" pitchFamily="2" charset="-78"/>
               </a:rPr>
               <a:t>صِفِي لِي غُرْفَتَكِ.</a:t>
@@ -13091,6 +13197,7 @@
                   <a:srgbClr val="1B3B6F"/>
                 </a:solidFill>
                 <a:latin typeface="Amiri" pitchFamily="2" charset="-78"/>
+                <a:ea typeface="Amiri" pitchFamily="2" charset="-78"/>
                 <a:cs typeface="Amiri" pitchFamily="2" charset="-78"/>
               </a:rPr>
               <a:t>أَرْسُمُ كُلَّ يَوْمٍ تَقْرِيبًا، وَأَلْعَبُ كُرَةَ الشَّبَكَةِ مَرَّتَيْنِ فِي الأُسْبُوعِ، لِأَنَّهَا تُعَلِّمُنِي العَمَلَ الجَمَاعِيَّ.</a:t>
@@ -13167,6 +13274,7 @@
                   <a:srgbClr val="1B3B6F"/>
                 </a:solidFill>
                 <a:latin typeface="Amiri" pitchFamily="2" charset="-78"/>
+                <a:ea typeface="Amiri" pitchFamily="2" charset="-78"/>
                 <a:cs typeface="Amiri" pitchFamily="2" charset="-78"/>
               </a:rPr>
               <a:t>مَاذَا تَفْعَلِينَ فِي وَقْتِ فَرَاغِكِ؟</a:t>
@@ -13270,6 +13378,7 @@
                   <a:srgbClr val="1B3B6F"/>
                 </a:solidFill>
                 <a:latin typeface="Amiri" pitchFamily="2" charset="-78"/>
+                <a:ea typeface="Amiri" pitchFamily="2" charset="-78"/>
                 <a:cs typeface="Amiri" pitchFamily="2" charset="-78"/>
               </a:rPr>
               <a:t>قَضَيْتُهَا فِي إِسْبَانْيَا؛ أَقَمْنَا فِي شَقَّةٍ قُرْبَ البَحْرِ، وَسَبَحْنَا كُلَّ يَوْمٍ، وَزُرْنَا قَصْرَ الحَمْرَاءِ.</a:t>
@@ -13346,6 +13455,7 @@
                   <a:srgbClr val="1B3B6F"/>
                 </a:solidFill>
                 <a:latin typeface="Amiri" pitchFamily="2" charset="-78"/>
+                <a:ea typeface="Amiri" pitchFamily="2" charset="-78"/>
                 <a:cs typeface="Amiri" pitchFamily="2" charset="-78"/>
               </a:rPr>
               <a:t>أَيْنَ قَضَيْتِ العُطْلَةَ الصَّيْفِيَّةَ؟</a:t>
@@ -13555,6 +13665,7 @@
                   <a:srgbClr val="D4AF37"/>
                 </a:solidFill>
                 <a:latin typeface="Amiri" pitchFamily="2" charset="-78"/>
+                <a:ea typeface="Amiri" pitchFamily="2" charset="-78"/>
                 <a:cs typeface="Amiri" pitchFamily="2" charset="-78"/>
               </a:rPr>
               <a:t>م</a:t>
@@ -13875,6 +13986,7 @@
                   <a:srgbClr val="8A6D1E"/>
                 </a:solidFill>
                 <a:latin typeface="Amiri" pitchFamily="2" charset="-78"/>
+                <a:ea typeface="Amiri" pitchFamily="2" charset="-78"/>
                 <a:cs typeface="Amiri" pitchFamily="2" charset="-78"/>
               </a:rPr>
               <a:t>نَمُوذَجُ الإِجَابَةِ</a:t>
@@ -14120,6 +14232,7 @@
                   <a:srgbClr val="1B3B6F"/>
                 </a:solidFill>
                 <a:latin typeface="Amiri" pitchFamily="2" charset="-78"/>
+                <a:ea typeface="Amiri" pitchFamily="2" charset="-78"/>
                 <a:cs typeface="Amiri" pitchFamily="2" charset="-78"/>
               </a:rPr>
               <a:t>مِنْ نَاحِيَةٍ، تَجْمَعُنَا بِأَصْدِقَاءَ يُشَارِكُونَنَا هِوَايَاتِنَا فِي بُلْدَانٍ بَعِيدَةٍ، وَمِنْ نَاحِيَةٍ أُخْرَى، لَا تُعَوِّضُ عَنْ صَدِيقٍ يَجْلِسُ بِجَانِبِكَ حِينَ تَحْزَنُ.</a:t>
@@ -14196,6 +14309,7 @@
                   <a:srgbClr val="1B3B6F"/>
                 </a:solidFill>
                 <a:latin typeface="Amiri" pitchFamily="2" charset="-78"/>
+                <a:ea typeface="Amiri" pitchFamily="2" charset="-78"/>
                 <a:cs typeface="Amiri" pitchFamily="2" charset="-78"/>
               </a:rPr>
               <a:t>هَلْ تَكْفِي صَدَاقَاتُ الإِنْتَرْنِتِ؟</a:t>
@@ -14299,6 +14413,7 @@
                   <a:srgbClr val="1B3B6F"/>
                 </a:solidFill>
                 <a:latin typeface="Amiri" pitchFamily="2" charset="-78"/>
+                <a:ea typeface="Amiri" pitchFamily="2" charset="-78"/>
                 <a:cs typeface="Amiri" pitchFamily="2" charset="-78"/>
               </a:rPr>
               <a:t>الصَّدِيقُ الحَقِيقِيُّ هُوَ الَّذِي يَقُولُ لَكَ الحَقِيقَةَ وَلَوْ كَانَتْ صَعْبَةً، وَيَفْرَحُ لِنَجَاحِكَ دُونَ غَيْرَةٍ.</a:t>
@@ -14375,6 +14490,7 @@
                   <a:srgbClr val="1B3B6F"/>
                 </a:solidFill>
                 <a:latin typeface="Amiri" pitchFamily="2" charset="-78"/>
+                <a:ea typeface="Amiri" pitchFamily="2" charset="-78"/>
                 <a:cs typeface="Amiri" pitchFamily="2" charset="-78"/>
               </a:rPr>
               <a:t>مَا صِفَاتُ الصَّدِيقِ الحَقِيقِيِّ فِي رَأْيِكِ؟</a:t>
@@ -14478,6 +14594,7 @@
                   <a:srgbClr val="1B3B6F"/>
                 </a:solidFill>
                 <a:latin typeface="Amiri" pitchFamily="2" charset="-78"/>
+                <a:ea typeface="Amiri" pitchFamily="2" charset="-78"/>
                 <a:cs typeface="Amiri" pitchFamily="2" charset="-78"/>
               </a:rPr>
               <a:t>عِنْدَمَا كَسَرْتُ رِجْلِي فِي الصَّيْفِ، كَانَ لِي مِئَاتُ المُتَابِعِينَ، غَيْرَ أَنَّ صَدِيقَتَيْنِ فَقَطْ زَارَتَانِي كُلَّ يَوْمٍ، فَعَرَفْتُ الفَرْقَ.</a:t>
@@ -14554,6 +14671,7 @@
                   <a:srgbClr val="1B3B6F"/>
                 </a:solidFill>
                 <a:latin typeface="Amiri" pitchFamily="2" charset="-78"/>
+                <a:ea typeface="Amiri" pitchFamily="2" charset="-78"/>
                 <a:cs typeface="Amiri" pitchFamily="2" charset="-78"/>
               </a:rPr>
               <a:t>هَلْ عِشْتِ تَجْرِبَةً تُثْبِتُ ذٰلِكَ؟</a:t>
@@ -14657,6 +14775,7 @@
                   <a:srgbClr val="1B3B6F"/>
                 </a:solidFill>
                 <a:latin typeface="Amiri" pitchFamily="2" charset="-78"/>
+                <a:ea typeface="Amiri" pitchFamily="2" charset="-78"/>
                 <a:cs typeface="Amiri" pitchFamily="2" charset="-78"/>
               </a:rPr>
               <a:t>صَحِيحٌ أَنَّ الهَاتِفَ أَسْهَلُ، غَيْرَ أَنَّ اللِّقَاءَ أَدْفَأُ؛ لِذٰلِكَ أَقْتَرِحُ أَنْ نَتْرُكَ الهَوَاتِفَ فِي سَلَّةٍ عِنْدَمَا نَجْتَمِعُ.</a:t>
@@ -14733,6 +14852,7 @@
                   <a:srgbClr val="1B3B6F"/>
                 </a:solidFill>
                 <a:latin typeface="Amiri" pitchFamily="2" charset="-78"/>
+                <a:ea typeface="Amiri" pitchFamily="2" charset="-78"/>
                 <a:cs typeface="Amiri" pitchFamily="2" charset="-78"/>
               </a:rPr>
               <a:t>لٰكِنَّ الشَّبَابَ يُفَضِّلُونَ الهَاتِفَ عَلَى اللِّقَاءِ.</a:t>
@@ -14836,6 +14956,7 @@
                   <a:srgbClr val="1B3B6F"/>
                 </a:solidFill>
                 <a:latin typeface="Amiri" pitchFamily="2" charset="-78"/>
+                <a:ea typeface="Amiri" pitchFamily="2" charset="-78"/>
                 <a:cs typeface="Amiri" pitchFamily="2" charset="-78"/>
               </a:rPr>
               <a:t>لَوِ اسْتَطَعْتُ، لَذَهَبْنَا إِلَى الشَّاطِئِ صَبَاحًا، وَلَطَبَخْنَا مَعًا فِي المَسَاءِ، وَلَمَا فَتَحْنَا الهَاتِفَ مَرَّةً وَاحِدَةً!</a:t>
@@ -14915,6 +15036,7 @@
                   <a:srgbClr val="1B3B6F"/>
                 </a:solidFill>
                 <a:latin typeface="Amiri" pitchFamily="2" charset="-78"/>
+                <a:ea typeface="Amiri" pitchFamily="2" charset="-78"/>
                 <a:cs typeface="Amiri" pitchFamily="2" charset="-78"/>
               </a:rPr>
               <a:t>لَوِ اسْتَطَعْتِ أَنْ تَقْضِيَ يَوْمًا كَامِلًا مَعَ صَدِيقَتِكِ، مَاذَا تَفْعَلَانِ؟</a:t>
@@ -15124,6 +15246,7 @@
                   <a:srgbClr val="D4AF37"/>
                 </a:solidFill>
                 <a:latin typeface="Amiri" pitchFamily="2" charset="-78"/>
+                <a:ea typeface="Amiri" pitchFamily="2" charset="-78"/>
                 <a:cs typeface="Amiri" pitchFamily="2" charset="-78"/>
               </a:rPr>
               <a:t>م</a:t>
@@ -15444,6 +15567,7 @@
                   <a:srgbClr val="8A6D1E"/>
                 </a:solidFill>
                 <a:latin typeface="Amiri" pitchFamily="2" charset="-78"/>
+                <a:ea typeface="Amiri" pitchFamily="2" charset="-78"/>
                 <a:cs typeface="Amiri" pitchFamily="2" charset="-78"/>
               </a:rPr>
               <a:t>أَنَا وَعَائِلَتِي</a:t>
@@ -15724,6 +15848,7 @@
                   <a:srgbClr val="1B3B6F"/>
                 </a:solidFill>
                 <a:latin typeface="Amiri" pitchFamily="2" charset="-78"/>
+                <a:ea typeface="Amiri" pitchFamily="2" charset="-78"/>
                 <a:cs typeface="Amiri" pitchFamily="2" charset="-78"/>
               </a:rPr>
               <a:t>أَنَا … وَ…</a:t>
@@ -15800,6 +15925,7 @@
                   <a:srgbClr val="1B3B6F"/>
                 </a:solidFill>
                 <a:latin typeface="Amiri" pitchFamily="2" charset="-78"/>
+                <a:ea typeface="Amiri" pitchFamily="2" charset="-78"/>
                 <a:cs typeface="Amiri" pitchFamily="2" charset="-78"/>
               </a:rPr>
               <a:t>صِفْ نَفْسَكَ.</a:t>
@@ -15968,6 +16094,7 @@
                   <a:srgbClr val="1B3B6F"/>
                 </a:solidFill>
                 <a:latin typeface="Amiri" pitchFamily="2" charset="-78"/>
+                <a:ea typeface="Amiri" pitchFamily="2" charset="-78"/>
                 <a:cs typeface="Amiri" pitchFamily="2" charset="-78"/>
               </a:rPr>
               <a:t>فِي عَائِلَتِي …</a:t>
@@ -16044,6 +16171,7 @@
                   <a:srgbClr val="1B3B6F"/>
                 </a:solidFill>
                 <a:latin typeface="Amiri" pitchFamily="2" charset="-78"/>
+                <a:ea typeface="Amiri" pitchFamily="2" charset="-78"/>
                 <a:cs typeface="Amiri" pitchFamily="2" charset="-78"/>
               </a:rPr>
               <a:t>كَمْ شَخْصًا فِي عَائِلَتِكَ؟</a:t>
@@ -16212,6 +16340,7 @@
                   <a:srgbClr val="1B3B6F"/>
                 </a:solidFill>
                 <a:latin typeface="Amiri" pitchFamily="2" charset="-78"/>
+                <a:ea typeface="Amiri" pitchFamily="2" charset="-78"/>
                 <a:cs typeface="Amiri" pitchFamily="2" charset="-78"/>
               </a:rPr>
               <a:t>بَيْتِي … وَفِيهِ …</a:t>
@@ -16288,6 +16417,7 @@
                   <a:srgbClr val="1B3B6F"/>
                 </a:solidFill>
                 <a:latin typeface="Amiri" pitchFamily="2" charset="-78"/>
+                <a:ea typeface="Amiri" pitchFamily="2" charset="-78"/>
                 <a:cs typeface="Amiri" pitchFamily="2" charset="-78"/>
               </a:rPr>
               <a:t>صِفْ بَيْتَكَ.</a:t>
@@ -16456,6 +16586,7 @@
                   <a:srgbClr val="1B3B6F"/>
                 </a:solidFill>
                 <a:latin typeface="Amiri" pitchFamily="2" charset="-78"/>
+                <a:ea typeface="Amiri" pitchFamily="2" charset="-78"/>
                 <a:cs typeface="Amiri" pitchFamily="2" charset="-78"/>
               </a:rPr>
               <a:t>لَوْنِي المُفَضَّلُ …</a:t>
@@ -16532,6 +16663,7 @@
                   <a:srgbClr val="1B3B6F"/>
                 </a:solidFill>
                 <a:latin typeface="Amiri" pitchFamily="2" charset="-78"/>
+                <a:ea typeface="Amiri" pitchFamily="2" charset="-78"/>
                 <a:cs typeface="Amiri" pitchFamily="2" charset="-78"/>
               </a:rPr>
               <a:t>مَا لَوْنُكَ المُفَضَّلُ؟</a:t>
@@ -16700,6 +16832,7 @@
                   <a:srgbClr val="1B3B6F"/>
                 </a:solidFill>
                 <a:latin typeface="Amiri" pitchFamily="2" charset="-78"/>
+                <a:ea typeface="Amiri" pitchFamily="2" charset="-78"/>
                 <a:cs typeface="Amiri" pitchFamily="2" charset="-78"/>
               </a:rPr>
               <a:t>هِوَايَتِي …</a:t>
@@ -16776,6 +16909,7 @@
                   <a:srgbClr val="1B3B6F"/>
                 </a:solidFill>
                 <a:latin typeface="Amiri" pitchFamily="2" charset="-78"/>
+                <a:ea typeface="Amiri" pitchFamily="2" charset="-78"/>
                 <a:cs typeface="Amiri" pitchFamily="2" charset="-78"/>
               </a:rPr>
               <a:t>مَا هِوَايَتُكَ؟</a:t>
@@ -16930,6 +17064,7 @@
                   <a:srgbClr val="1B3B6F"/>
                 </a:solidFill>
                 <a:latin typeface="Amiri" pitchFamily="2" charset="-78"/>
+                <a:ea typeface="Amiri" pitchFamily="2" charset="-78"/>
                 <a:cs typeface="Amiri" pitchFamily="2" charset="-78"/>
               </a:rPr>
               <a:t>عَفْوًا، هَلْ يُمْكِنُ أَنْ تُعِيدَ السُّؤَالَ؟</a:t>
@@ -17063,6 +17198,7 @@
                   <a:srgbClr val="D4AF37"/>
                 </a:solidFill>
                 <a:latin typeface="Amiri" pitchFamily="2" charset="-78"/>
+                <a:ea typeface="Amiri" pitchFamily="2" charset="-78"/>
                 <a:cs typeface="Amiri" pitchFamily="2" charset="-78"/>
               </a:rPr>
               <a:t>م</a:t>
@@ -17383,6 +17519,7 @@
                   <a:srgbClr val="8A6D1E"/>
                 </a:solidFill>
                 <a:latin typeface="Amiri" pitchFamily="2" charset="-78"/>
+                <a:ea typeface="Amiri" pitchFamily="2" charset="-78"/>
                 <a:cs typeface="Amiri" pitchFamily="2" charset="-78"/>
               </a:rPr>
               <a:t>حَيَاتِي وَوَقْتُ فَرَاغِي</a:t>
@@ -17663,6 +17800,7 @@
                   <a:srgbClr val="1B3B6F"/>
                 </a:solidFill>
                 <a:latin typeface="Amiri" pitchFamily="2" charset="-78"/>
+                <a:ea typeface="Amiri" pitchFamily="2" charset="-78"/>
                 <a:cs typeface="Amiri" pitchFamily="2" charset="-78"/>
               </a:rPr>
               <a:t>… شَخْصٌ … ؛ هُوَ / هِيَ … وَ…</a:t>
@@ -17739,6 +17877,7 @@
                   <a:srgbClr val="1B3B6F"/>
                 </a:solidFill>
                 <a:latin typeface="Amiri" pitchFamily="2" charset="-78"/>
+                <a:ea typeface="Amiri" pitchFamily="2" charset="-78"/>
                 <a:cs typeface="Amiri" pitchFamily="2" charset="-78"/>
               </a:rPr>
               <a:t>صِفْ شَخْصًا مُهِمًّا فِي حَيَاتِكَ.</a:t>
@@ -17842,6 +17981,7 @@
                   <a:srgbClr val="1B3B6F"/>
                 </a:solidFill>
                 <a:latin typeface="Amiri" pitchFamily="2" charset="-78"/>
+                <a:ea typeface="Amiri" pitchFamily="2" charset="-78"/>
                 <a:cs typeface="Amiri" pitchFamily="2" charset="-78"/>
               </a:rPr>
               <a:t>غُرْفَتِي المُفَضَّلَةُ … لِأَنَّ … ؛ فِيهَا …</a:t>
@@ -17918,6 +18058,7 @@
                   <a:srgbClr val="1B3B6F"/>
                 </a:solidFill>
                 <a:latin typeface="Amiri" pitchFamily="2" charset="-78"/>
+                <a:ea typeface="Amiri" pitchFamily="2" charset="-78"/>
                 <a:cs typeface="Amiri" pitchFamily="2" charset="-78"/>
               </a:rPr>
               <a:t>مَا الغُرْفَةُ المُفَضَّلَةُ فِي بَيْتِكَ؟</a:t>
@@ -18021,6 +18162,7 @@
                   <a:srgbClr val="1B3B6F"/>
                 </a:solidFill>
                 <a:latin typeface="Amiri" pitchFamily="2" charset="-78"/>
+                <a:ea typeface="Amiri" pitchFamily="2" charset="-78"/>
                 <a:cs typeface="Amiri" pitchFamily="2" charset="-78"/>
               </a:rPr>
               <a:t>اشْتَرَيْتُ … لَوْنُهُ … وَكَانَ …</a:t>
@@ -18097,6 +18239,7 @@
                   <a:srgbClr val="1B3B6F"/>
                 </a:solidFill>
                 <a:latin typeface="Amiri" pitchFamily="2" charset="-78"/>
+                <a:ea typeface="Amiri" pitchFamily="2" charset="-78"/>
                 <a:cs typeface="Amiri" pitchFamily="2" charset="-78"/>
               </a:rPr>
               <a:t>مَاذَا اشْتَرَيْتَ آخِرَ مَرَّةٍ ذَهَبْتَ إِلَى السُّوقِ؟</a:t>
@@ -18200,6 +18343,7 @@
                   <a:srgbClr val="1B3B6F"/>
                 </a:solidFill>
                 <a:latin typeface="Amiri" pitchFamily="2" charset="-78"/>
+                <a:ea typeface="Amiri" pitchFamily="2" charset="-78"/>
                 <a:cs typeface="Amiri" pitchFamily="2" charset="-78"/>
               </a:rPr>
               <a:t>كُنْتُ … أَمَّا الآنَ فَأَتَعَلَّمُ …</a:t>
@@ -18276,6 +18420,7 @@
                   <a:srgbClr val="1B3B6F"/>
                 </a:solidFill>
                 <a:latin typeface="Amiri" pitchFamily="2" charset="-78"/>
+                <a:ea typeface="Amiri" pitchFamily="2" charset="-78"/>
                 <a:cs typeface="Amiri" pitchFamily="2" charset="-78"/>
               </a:rPr>
               <a:t>كَيْفَ تَغَيَّرَتْ هِوَايَاتُكَ؟</a:t>
@@ -18379,6 +18524,7 @@
                   <a:srgbClr val="1B3B6F"/>
                 </a:solidFill>
                 <a:latin typeface="Amiri" pitchFamily="2" charset="-78"/>
+                <a:ea typeface="Amiri" pitchFamily="2" charset="-78"/>
                 <a:cs typeface="Amiri" pitchFamily="2" charset="-78"/>
               </a:rPr>
               <a:t>سَأَقْضِيهَا فِي … لِأَنَّ …</a:t>
@@ -18455,6 +18601,7 @@
                   <a:srgbClr val="1B3B6F"/>
                 </a:solidFill>
                 <a:latin typeface="Amiri" pitchFamily="2" charset="-78"/>
+                <a:ea typeface="Amiri" pitchFamily="2" charset="-78"/>
                 <a:cs typeface="Amiri" pitchFamily="2" charset="-78"/>
               </a:rPr>
               <a:t>أَيْنَ سَتَقْضِي العُطْلَةَ القَادِمَةَ؟</a:t>
@@ -18664,6 +18811,7 @@
                   <a:srgbClr val="D4AF37"/>
                 </a:solidFill>
                 <a:latin typeface="Amiri" pitchFamily="2" charset="-78"/>
+                <a:ea typeface="Amiri" pitchFamily="2" charset="-78"/>
                 <a:cs typeface="Amiri" pitchFamily="2" charset="-78"/>
               </a:rPr>
               <a:t>م</a:t>
@@ -18984,6 +19132,7 @@
                   <a:srgbClr val="8A6D1E"/>
                 </a:solidFill>
                 <a:latin typeface="Amiri" pitchFamily="2" charset="-78"/>
+                <a:ea typeface="Amiri" pitchFamily="2" charset="-78"/>
                 <a:cs typeface="Amiri" pitchFamily="2" charset="-78"/>
               </a:rPr>
               <a:t>العَلَاقَاتُ وَالبَيْتُ وَالمُجْتَمَعُ</a:t>
@@ -19264,6 +19413,7 @@
                   <a:srgbClr val="1B3B6F"/>
                 </a:solidFill>
                 <a:latin typeface="Amiri" pitchFamily="2" charset="-78"/>
+                <a:ea typeface="Amiri" pitchFamily="2" charset="-78"/>
                 <a:cs typeface="Amiri" pitchFamily="2" charset="-78"/>
               </a:rPr>
               <a:t>صَحِيحٌ أَنَّ … غَيْرَ أَنَّ …</a:t>
@@ -19340,6 +19490,7 @@
                   <a:srgbClr val="1B3B6F"/>
                 </a:solidFill>
                 <a:latin typeface="Amiri" pitchFamily="2" charset="-78"/>
+                <a:ea typeface="Amiri" pitchFamily="2" charset="-78"/>
                 <a:cs typeface="Amiri" pitchFamily="2" charset="-78"/>
               </a:rPr>
               <a:t>هَلِ الأُسْرَةُ أَهَمُّ مِنَ الأَصْدِقَاءِ؟</a:t>
@@ -19443,6 +19594,7 @@
                   <a:srgbClr val="1B3B6F"/>
                 </a:solidFill>
                 <a:latin typeface="Amiri" pitchFamily="2" charset="-78"/>
+                <a:ea typeface="Amiri" pitchFamily="2" charset="-78"/>
                 <a:cs typeface="Amiri" pitchFamily="2" charset="-78"/>
               </a:rPr>
               <a:t>لِلْأَسَفِ … ؛ مَعَ أَنَّ …</a:t>
@@ -19519,6 +19671,7 @@
                   <a:srgbClr val="1B3B6F"/>
                 </a:solidFill>
                 <a:latin typeface="Amiri" pitchFamily="2" charset="-78"/>
+                <a:ea typeface="Amiri" pitchFamily="2" charset="-78"/>
                 <a:cs typeface="Amiri" pitchFamily="2" charset="-78"/>
               </a:rPr>
               <a:t>هَلْ يُؤَثِّرُ المَظْهَرُ عَلَى نَظْرَةِ النَّاسِ إِلَيْنَا؟</a:t>
@@ -19622,6 +19775,7 @@
                   <a:srgbClr val="1B3B6F"/>
                 </a:solidFill>
                 <a:latin typeface="Amiri" pitchFamily="2" charset="-78"/>
+                <a:ea typeface="Amiri" pitchFamily="2" charset="-78"/>
                 <a:cs typeface="Amiri" pitchFamily="2" charset="-78"/>
               </a:rPr>
               <a:t>مِنْ نَاحِيَةٍ … وَمِنْ نَاحِيَةٍ أُخْرَى …</a:t>
@@ -19698,6 +19852,7 @@
                   <a:srgbClr val="1B3B6F"/>
                 </a:solidFill>
                 <a:latin typeface="Amiri" pitchFamily="2" charset="-78"/>
+                <a:ea typeface="Amiri" pitchFamily="2" charset="-78"/>
                 <a:cs typeface="Amiri" pitchFamily="2" charset="-78"/>
               </a:rPr>
               <a:t>هَلْ تُضِيعُ الشَّاشَاتُ وَقْتَ الفَرَاغِ؟</a:t>
@@ -19801,6 +19956,7 @@
                   <a:srgbClr val="1B3B6F"/>
                 </a:solidFill>
                 <a:latin typeface="Amiri" pitchFamily="2" charset="-78"/>
+                <a:ea typeface="Amiri" pitchFamily="2" charset="-78"/>
                 <a:cs typeface="Amiri" pitchFamily="2" charset="-78"/>
               </a:rPr>
               <a:t>كَانَتِ البُيُوتُ … أَمَّا اليَوْمَ فَالشُّقَقُ …</a:t>
@@ -19877,6 +20033,7 @@
                   <a:srgbClr val="1B3B6F"/>
                 </a:solidFill>
                 <a:latin typeface="Amiri" pitchFamily="2" charset="-78"/>
+                <a:ea typeface="Amiri" pitchFamily="2" charset="-78"/>
                 <a:cs typeface="Amiri" pitchFamily="2" charset="-78"/>
               </a:rPr>
               <a:t>كَيْفَ تَغَيَّرَتِ البُيُوتُ مُنْذُ أَيَّامِ أَجْدَادِكَ؟</a:t>
@@ -19980,6 +20137,7 @@
                   <a:srgbClr val="1B3B6F"/>
                 </a:solidFill>
                 <a:latin typeface="Amiri" pitchFamily="2" charset="-78"/>
+                <a:ea typeface="Amiri" pitchFamily="2" charset="-78"/>
                 <a:cs typeface="Amiri" pitchFamily="2" charset="-78"/>
               </a:rPr>
               <a:t>لَوْ صَمَّمْتُهُ، لَجَعَلْتُهُ …</a:t>
@@ -20056,6 +20214,7 @@
                   <a:srgbClr val="1B3B6F"/>
                 </a:solidFill>
                 <a:latin typeface="Amiri" pitchFamily="2" charset="-78"/>
+                <a:ea typeface="Amiri" pitchFamily="2" charset="-78"/>
                 <a:cs typeface="Amiri" pitchFamily="2" charset="-78"/>
               </a:rPr>
               <a:t>لَوْ صَمَّمْتَ بَيْتَ أَحْلَامِكَ، كَيْفَ يَكُونُ؟</a:t>
@@ -20265,6 +20424,7 @@
                   <a:srgbClr val="D4AF37"/>
                 </a:solidFill>
                 <a:latin typeface="Amiri" pitchFamily="2" charset="-78"/>
+                <a:ea typeface="Amiri" pitchFamily="2" charset="-78"/>
                 <a:cs typeface="Amiri" pitchFamily="2" charset="-78"/>
               </a:rPr>
               <a:t>م</a:t>
@@ -20585,6 +20745,7 @@
                   <a:srgbClr val="8A6D1E"/>
                 </a:solidFill>
                 <a:latin typeface="Amiri" pitchFamily="2" charset="-78"/>
+                <a:ea typeface="Amiri" pitchFamily="2" charset="-78"/>
                 <a:cs typeface="Amiri" pitchFamily="2" charset="-78"/>
               </a:rPr>
               <a:t>آدَابُ الصَّفِّ</a:t>
@@ -22116,6 +22277,7 @@
                   <a:srgbClr val="D4AF37"/>
                 </a:solidFill>
                 <a:latin typeface="Amiri" pitchFamily="2" charset="-78"/>
+                <a:ea typeface="Amiri" pitchFamily="2" charset="-78"/>
                 <a:cs typeface="Amiri" pitchFamily="2" charset="-78"/>
               </a:rPr>
               <a:t>م</a:t>
@@ -22436,6 +22598,7 @@
                   <a:srgbClr val="8A6D1E"/>
                 </a:solidFill>
                 <a:latin typeface="Amiri" pitchFamily="2" charset="-78"/>
+                <a:ea typeface="Amiri" pitchFamily="2" charset="-78"/>
                 <a:cs typeface="Amiri" pitchFamily="2" charset="-78"/>
               </a:rPr>
               <a:t>نَمُوذَجُ الإِجَابَةِ</a:t>
@@ -22678,6 +22841,7 @@
                   <a:srgbClr val="1B3B6F"/>
                 </a:solidFill>
                 <a:latin typeface="Amiri" pitchFamily="2" charset="-78"/>
+                <a:ea typeface="Amiri" pitchFamily="2" charset="-78"/>
                 <a:cs typeface="Amiri" pitchFamily="2" charset="-78"/>
               </a:rPr>
               <a:t>أَنَا قَصِيرٌ وَنَشِيطٌ.</a:t>
@@ -22754,6 +22918,7 @@
                   <a:srgbClr val="1B3B6F"/>
                 </a:solidFill>
                 <a:latin typeface="Amiri" pitchFamily="2" charset="-78"/>
+                <a:ea typeface="Amiri" pitchFamily="2" charset="-78"/>
                 <a:cs typeface="Amiri" pitchFamily="2" charset="-78"/>
               </a:rPr>
               <a:t>صِفْ نَفْسَكَ.</a:t>
@@ -22857,6 +23022,7 @@
                   <a:srgbClr val="1B3B6F"/>
                 </a:solidFill>
                 <a:latin typeface="Amiri" pitchFamily="2" charset="-78"/>
+                <a:ea typeface="Amiri" pitchFamily="2" charset="-78"/>
                 <a:cs typeface="Amiri" pitchFamily="2" charset="-78"/>
               </a:rPr>
               <a:t>فِي عَائِلَتِي خَمْسَةُ أَشْخَاصٍ.</a:t>
@@ -22933,6 +23099,7 @@
                   <a:srgbClr val="1B3B6F"/>
                 </a:solidFill>
                 <a:latin typeface="Amiri" pitchFamily="2" charset="-78"/>
+                <a:ea typeface="Amiri" pitchFamily="2" charset="-78"/>
                 <a:cs typeface="Amiri" pitchFamily="2" charset="-78"/>
               </a:rPr>
               <a:t>كَمْ شَخْصًا فِي عَائِلَتِكَ؟</a:t>
@@ -23036,6 +23203,7 @@
                   <a:srgbClr val="1B3B6F"/>
                 </a:solidFill>
                 <a:latin typeface="Amiri" pitchFamily="2" charset="-78"/>
+                <a:ea typeface="Amiri" pitchFamily="2" charset="-78"/>
                 <a:cs typeface="Amiri" pitchFamily="2" charset="-78"/>
               </a:rPr>
               <a:t>بَيْتِي كَبِيرٌ، وَفِيهِ ثَلَاثُ غُرَفِ نَوْمٍ.</a:t>
@@ -23112,6 +23280,7 @@
                   <a:srgbClr val="1B3B6F"/>
                 </a:solidFill>
                 <a:latin typeface="Amiri" pitchFamily="2" charset="-78"/>
+                <a:ea typeface="Amiri" pitchFamily="2" charset="-78"/>
                 <a:cs typeface="Amiri" pitchFamily="2" charset="-78"/>
               </a:rPr>
               <a:t>صِفْ بَيْتَكَ.</a:t>
@@ -23215,6 +23384,7 @@
                   <a:srgbClr val="1B3B6F"/>
                 </a:solidFill>
                 <a:latin typeface="Amiri" pitchFamily="2" charset="-78"/>
+                <a:ea typeface="Amiri" pitchFamily="2" charset="-78"/>
                 <a:cs typeface="Amiri" pitchFamily="2" charset="-78"/>
               </a:rPr>
               <a:t>لَوْنِيَ المُفَضَّلُ الأَخْضَرُ.</a:t>
@@ -23291,6 +23461,7 @@
                   <a:srgbClr val="1B3B6F"/>
                 </a:solidFill>
                 <a:latin typeface="Amiri" pitchFamily="2" charset="-78"/>
+                <a:ea typeface="Amiri" pitchFamily="2" charset="-78"/>
                 <a:cs typeface="Amiri" pitchFamily="2" charset="-78"/>
               </a:rPr>
               <a:t>مَا لَوْنُكَ المُفَضَّلُ؟</a:t>
@@ -23394,6 +23565,7 @@
                   <a:srgbClr val="1B3B6F"/>
                 </a:solidFill>
                 <a:latin typeface="Amiri" pitchFamily="2" charset="-78"/>
+                <a:ea typeface="Amiri" pitchFamily="2" charset="-78"/>
                 <a:cs typeface="Amiri" pitchFamily="2" charset="-78"/>
               </a:rPr>
               <a:t>هِوَايَتِي السِّبَاحَةُ.</a:t>
@@ -23470,6 +23642,7 @@
                   <a:srgbClr val="1B3B6F"/>
                 </a:solidFill>
                 <a:latin typeface="Amiri" pitchFamily="2" charset="-78"/>
+                <a:ea typeface="Amiri" pitchFamily="2" charset="-78"/>
                 <a:cs typeface="Amiri" pitchFamily="2" charset="-78"/>
               </a:rPr>
               <a:t>مَا هِوَايَتُكَ؟</a:t>
@@ -23679,6 +23852,7 @@
                   <a:srgbClr val="D4AF37"/>
                 </a:solidFill>
                 <a:latin typeface="Amiri" pitchFamily="2" charset="-78"/>
+                <a:ea typeface="Amiri" pitchFamily="2" charset="-78"/>
                 <a:cs typeface="Amiri" pitchFamily="2" charset="-78"/>
               </a:rPr>
               <a:t>م</a:t>
@@ -23999,6 +24173,7 @@
                   <a:srgbClr val="8A6D1E"/>
                 </a:solidFill>
                 <a:latin typeface="Amiri" pitchFamily="2" charset="-78"/>
+                <a:ea typeface="Amiri" pitchFamily="2" charset="-78"/>
                 <a:cs typeface="Amiri" pitchFamily="2" charset="-78"/>
               </a:rPr>
               <a:t>نَمُوذَجُ الإِجَابَةِ</a:t>
@@ -24241,6 +24416,7 @@
                   <a:srgbClr val="1B3B6F"/>
                 </a:solidFill>
                 <a:latin typeface="Amiri" pitchFamily="2" charset="-78"/>
+                <a:ea typeface="Amiri" pitchFamily="2" charset="-78"/>
                 <a:cs typeface="Amiri" pitchFamily="2" charset="-78"/>
               </a:rPr>
               <a:t>جَدَّتِي شَخْصٌ مُهِمٌّ جِدًّا؛ هِيَ قَصِيرَةٌ وَشَعْرُهَا أَبْيَضُ، وَهِيَ أَطْيَبُ إِنْسَانَةٍ أَعْرِفُهَا.</a:t>
@@ -24317,6 +24493,7 @@
                   <a:srgbClr val="1B3B6F"/>
                 </a:solidFill>
                 <a:latin typeface="Amiri" pitchFamily="2" charset="-78"/>
+                <a:ea typeface="Amiri" pitchFamily="2" charset="-78"/>
                 <a:cs typeface="Amiri" pitchFamily="2" charset="-78"/>
               </a:rPr>
               <a:t>صِفْ شَخْصًا مُهِمًّا فِي حَيَاتِكَ.</a:t>
@@ -24420,6 +24597,7 @@
                   <a:srgbClr val="1B3B6F"/>
                 </a:solidFill>
                 <a:latin typeface="Amiri" pitchFamily="2" charset="-78"/>
+                <a:ea typeface="Amiri" pitchFamily="2" charset="-78"/>
                 <a:cs typeface="Amiri" pitchFamily="2" charset="-78"/>
               </a:rPr>
               <a:t>غُرْفَتِيَ المُفَضَّلَةُ المَطْبَخُ، لِأَنَّ العَائِلَةَ تَجْتَمِعُ فِيهِ؛ فِيهِ طَاوِلَةٌ خَشَبِيَّةٌ كَبِيرَةٌ.</a:t>
@@ -24496,6 +24674,7 @@
                   <a:srgbClr val="1B3B6F"/>
                 </a:solidFill>
                 <a:latin typeface="Amiri" pitchFamily="2" charset="-78"/>
+                <a:ea typeface="Amiri" pitchFamily="2" charset="-78"/>
                 <a:cs typeface="Amiri" pitchFamily="2" charset="-78"/>
               </a:rPr>
               <a:t>مَا الغُرْفَةُ المُفَضَّلَةُ فِي بَيْتِكَ؟</a:t>
@@ -24599,6 +24778,7 @@
                   <a:srgbClr val="1B3B6F"/>
                 </a:solidFill>
                 <a:latin typeface="Amiri" pitchFamily="2" charset="-78"/>
+                <a:ea typeface="Amiri" pitchFamily="2" charset="-78"/>
                 <a:cs typeface="Amiri" pitchFamily="2" charset="-78"/>
               </a:rPr>
               <a:t>اشْتَرَيْتُ حِذَاءً رِيَاضِيًّا لَوْنُهُ أَبْيَضُ، وَكَانَ أَرْخَصَ مِمَّا تَوَقَّعْتُ.</a:t>
@@ -24675,6 +24855,7 @@
                   <a:srgbClr val="1B3B6F"/>
                 </a:solidFill>
                 <a:latin typeface="Amiri" pitchFamily="2" charset="-78"/>
+                <a:ea typeface="Amiri" pitchFamily="2" charset="-78"/>
                 <a:cs typeface="Amiri" pitchFamily="2" charset="-78"/>
               </a:rPr>
               <a:t>مَاذَا اشْتَرَيْتَ آخِرَ مَرَّةٍ ذَهَبْتَ إِلَى السُّوقِ؟</a:t>
@@ -24778,6 +24959,7 @@
                   <a:srgbClr val="1B3B6F"/>
                 </a:solidFill>
                 <a:latin typeface="Amiri" pitchFamily="2" charset="-78"/>
+                <a:ea typeface="Amiri" pitchFamily="2" charset="-78"/>
                 <a:cs typeface="Amiri" pitchFamily="2" charset="-78"/>
               </a:rPr>
               <a:t>كُنْتُ أَلْعَبُ بِالدُّمَى، أَمَّا الآنَ فَأَتَعَلَّمُ العَزْفَ عَلَى العُودِ.</a:t>
@@ -24854,6 +25036,7 @@
                   <a:srgbClr val="1B3B6F"/>
                 </a:solidFill>
                 <a:latin typeface="Amiri" pitchFamily="2" charset="-78"/>
+                <a:ea typeface="Amiri" pitchFamily="2" charset="-78"/>
                 <a:cs typeface="Amiri" pitchFamily="2" charset="-78"/>
               </a:rPr>
               <a:t>كَيْفَ تَغَيَّرَتْ هِوَايَاتُكَ؟</a:t>
@@ -24957,6 +25140,7 @@
                   <a:srgbClr val="1B3B6F"/>
                 </a:solidFill>
                 <a:latin typeface="Amiri" pitchFamily="2" charset="-78"/>
+                <a:ea typeface="Amiri" pitchFamily="2" charset="-78"/>
                 <a:cs typeface="Amiri" pitchFamily="2" charset="-78"/>
               </a:rPr>
               <a:t>سَأَقْضِيهَا فِي تُرْكِيَا مَعَ عَائِلَتِي، لِأَنَّنَا نُرِيدُ أَنْ نَزُورَ إِسْطَنْبُولَ.</a:t>
@@ -25033,6 +25217,7 @@
                   <a:srgbClr val="1B3B6F"/>
                 </a:solidFill>
                 <a:latin typeface="Amiri" pitchFamily="2" charset="-78"/>
+                <a:ea typeface="Amiri" pitchFamily="2" charset="-78"/>
                 <a:cs typeface="Amiri" pitchFamily="2" charset="-78"/>
               </a:rPr>
               <a:t>أَيْنَ سَتَقْضِي العُطْلَةَ القَادِمَةَ؟</a:t>
@@ -25242,6 +25427,7 @@
                   <a:srgbClr val="D4AF37"/>
                 </a:solidFill>
                 <a:latin typeface="Amiri" pitchFamily="2" charset="-78"/>
+                <a:ea typeface="Amiri" pitchFamily="2" charset="-78"/>
                 <a:cs typeface="Amiri" pitchFamily="2" charset="-78"/>
               </a:rPr>
               <a:t>م</a:t>
@@ -25562,6 +25748,7 @@
                   <a:srgbClr val="8A6D1E"/>
                 </a:solidFill>
                 <a:latin typeface="Amiri" pitchFamily="2" charset="-78"/>
+                <a:ea typeface="Amiri" pitchFamily="2" charset="-78"/>
                 <a:cs typeface="Amiri" pitchFamily="2" charset="-78"/>
               </a:rPr>
               <a:t>نَمُوذَجُ الإِجَابَةِ</a:t>
@@ -25804,6 +25991,7 @@
                   <a:srgbClr val="1B3B6F"/>
                 </a:solidFill>
                 <a:latin typeface="Amiri" pitchFamily="2" charset="-78"/>
+                <a:ea typeface="Amiri" pitchFamily="2" charset="-78"/>
                 <a:cs typeface="Amiri" pitchFamily="2" charset="-78"/>
               </a:rPr>
               <a:t>صَحِيحٌ أَنَّ الأُسْرَةَ تَبْقَى دَائِمًا، غَيْرَ أَنَّ الأَصْدِقَاءَ هُمُ الَّذِينَ نَخْتَارُهُمْ بِأَنْفُسِنَا؛ لِذٰلِكَ نَحْتَاجُ إِلَى الاثْنَيْنِ.</a:t>
@@ -25880,6 +26068,7 @@
                   <a:srgbClr val="1B3B6F"/>
                 </a:solidFill>
                 <a:latin typeface="Amiri" pitchFamily="2" charset="-78"/>
+                <a:ea typeface="Amiri" pitchFamily="2" charset="-78"/>
                 <a:cs typeface="Amiri" pitchFamily="2" charset="-78"/>
               </a:rPr>
               <a:t>هَلِ الأُسْرَةُ أَهَمُّ مِنَ الأَصْدِقَاءِ؟</a:t>
@@ -25983,6 +26172,7 @@
                   <a:srgbClr val="1B3B6F"/>
                 </a:solidFill>
                 <a:latin typeface="Amiri" pitchFamily="2" charset="-78"/>
+                <a:ea typeface="Amiri" pitchFamily="2" charset="-78"/>
                 <a:cs typeface="Amiri" pitchFamily="2" charset="-78"/>
               </a:rPr>
               <a:t>لِلْأَسَفِ نَعَمْ، فَالنَّاسُ يَحْكُمُونَ مِنَ النَّظْرَةِ الأُولَى، مَعَ أَنَّ الشَّخْصِيَّةَ أَهَمُّ بِكَثِيرٍ مِنَ المَلَابِسِ.</a:t>
@@ -26059,6 +26249,7 @@
                   <a:srgbClr val="1B3B6F"/>
                 </a:solidFill>
                 <a:latin typeface="Amiri" pitchFamily="2" charset="-78"/>
+                <a:ea typeface="Amiri" pitchFamily="2" charset="-78"/>
                 <a:cs typeface="Amiri" pitchFamily="2" charset="-78"/>
               </a:rPr>
               <a:t>هَلْ يُؤَثِّرُ المَظْهَرُ عَلَى نَظْرَةِ النَّاسِ إِلَيْنَا؟</a:t>
@@ -26162,6 +26353,7 @@
                   <a:srgbClr val="1B3B6F"/>
                 </a:solidFill>
                 <a:latin typeface="Amiri" pitchFamily="2" charset="-78"/>
+                <a:ea typeface="Amiri" pitchFamily="2" charset="-78"/>
                 <a:cs typeface="Amiri" pitchFamily="2" charset="-78"/>
               </a:rPr>
               <a:t>مِنْ نَاحِيَةٍ، نَتَعَلَّمُ مِنْهَا هِوَايَاتٍ جَدِيدَةً، وَمِنْ نَاحِيَةٍ أُخْرَى، تَسْرِقُ سَاعَاتٍ كُنَّا نَقْضِيهَا فِي الرِّيَاضَةِ وَالقِرَاءَةِ.</a:t>
@@ -26238,6 +26430,7 @@
                   <a:srgbClr val="1B3B6F"/>
                 </a:solidFill>
                 <a:latin typeface="Amiri" pitchFamily="2" charset="-78"/>
+                <a:ea typeface="Amiri" pitchFamily="2" charset="-78"/>
                 <a:cs typeface="Amiri" pitchFamily="2" charset="-78"/>
               </a:rPr>
               <a:t>هَلْ تُضِيعُ الشَّاشَاتُ وَقْتَ الفَرَاغِ؟</a:t>
@@ -26447,6 +26640,7 @@
                   <a:srgbClr val="D4AF37"/>
                 </a:solidFill>
                 <a:latin typeface="Amiri" pitchFamily="2" charset="-78"/>
+                <a:ea typeface="Amiri" pitchFamily="2" charset="-78"/>
                 <a:cs typeface="Amiri" pitchFamily="2" charset="-78"/>
               </a:rPr>
               <a:t>م</a:t>
@@ -26767,6 +26961,7 @@
                   <a:srgbClr val="8A6D1E"/>
                 </a:solidFill>
                 <a:latin typeface="Amiri" pitchFamily="2" charset="-78"/>
+                <a:ea typeface="Amiri" pitchFamily="2" charset="-78"/>
                 <a:cs typeface="Amiri" pitchFamily="2" charset="-78"/>
               </a:rPr>
               <a:t>نَمُوذَجُ الإِجَابَةِ</a:t>
@@ -27009,6 +27204,7 @@
                   <a:srgbClr val="1B3B6F"/>
                 </a:solidFill>
                 <a:latin typeface="Amiri" pitchFamily="2" charset="-78"/>
+                <a:ea typeface="Amiri" pitchFamily="2" charset="-78"/>
                 <a:cs typeface="Amiri" pitchFamily="2" charset="-78"/>
               </a:rPr>
               <a:t>كَانَتِ البُيُوتُ أَكْبَرَ، وَتَسْكُنُ فِيهَا العَائِلَةُ كُلُّهَا، أَمَّا اليَوْمَ فَالشُّقَقُ أَصْغَرُ، وَلِكُلِّ شَخْصٍ غُرْفَتُهُ وَشَاشَتُهُ.</a:t>
@@ -27085,6 +27281,7 @@
                   <a:srgbClr val="1B3B6F"/>
                 </a:solidFill>
                 <a:latin typeface="Amiri" pitchFamily="2" charset="-78"/>
+                <a:ea typeface="Amiri" pitchFamily="2" charset="-78"/>
                 <a:cs typeface="Amiri" pitchFamily="2" charset="-78"/>
               </a:rPr>
               <a:t>كَيْفَ تَغَيَّرَتِ البُيُوتُ مُنْذُ أَيَّامِ أَجْدَادِكَ؟</a:t>
@@ -27188,6 +27385,7 @@
                   <a:srgbClr val="1B3B6F"/>
                 </a:solidFill>
                 <a:latin typeface="Amiri" pitchFamily="2" charset="-78"/>
+                <a:ea typeface="Amiri" pitchFamily="2" charset="-78"/>
                 <a:cs typeface="Amiri" pitchFamily="2" charset="-78"/>
               </a:rPr>
               <a:t>لَوْ صَمَّمْتُهُ، لَجَعَلْتُهُ قُرْبَ البَحْرِ، بِغُرَفٍ وَاسِعَةٍ وَنَوَافِذَ كَبِيرَةٍ، وَبِحَدِيقَةٍ يَجْتَمِعُ فِيهَا كُلُّ أَصْدِقَائِي.</a:t>
@@ -27264,6 +27462,7 @@
                   <a:srgbClr val="1B3B6F"/>
                 </a:solidFill>
                 <a:latin typeface="Amiri" pitchFamily="2" charset="-78"/>
+                <a:ea typeface="Amiri" pitchFamily="2" charset="-78"/>
                 <a:cs typeface="Amiri" pitchFamily="2" charset="-78"/>
               </a:rPr>
               <a:t>لَوْ صَمَّمْتَ بَيْتَ أَحْلَامِكَ، كَيْفَ يَكُونُ؟</a:t>
@@ -27473,6 +27672,7 @@
                   <a:srgbClr val="D4AF37"/>
                 </a:solidFill>
                 <a:latin typeface="Amiri" pitchFamily="2" charset="-78"/>
+                <a:ea typeface="Amiri" pitchFamily="2" charset="-78"/>
                 <a:cs typeface="Amiri" pitchFamily="2" charset="-78"/>
               </a:rPr>
               <a:t>م</a:t>
@@ -27793,6 +27993,7 @@
                   <a:srgbClr val="8A6D1E"/>
                 </a:solidFill>
                 <a:latin typeface="Amiri" pitchFamily="2" charset="-78"/>
+                <a:ea typeface="Amiri" pitchFamily="2" charset="-78"/>
                 <a:cs typeface="Amiri" pitchFamily="2" charset="-78"/>
               </a:rPr>
               <a:t>قَيِّمْ عَمَلَكَ</a:t>
@@ -29037,6 +29238,7 @@
                   <a:srgbClr val="FFFFFF"/>
                 </a:solidFill>
                 <a:latin typeface="Amiri" pitchFamily="2" charset="-78"/>
+                <a:ea typeface="Amiri" pitchFamily="2" charset="-78"/>
                 <a:cs typeface="Amiri" pitchFamily="2" charset="-78"/>
               </a:rPr>
               <a:t>أَحْسَنْتُمْ! إِلَى اللِّقَاءِ</a:t>
@@ -29189,6 +29391,7 @@
                   <a:srgbClr val="D4AF37"/>
                 </a:solidFill>
                 <a:latin typeface="Amiri" pitchFamily="2" charset="-78"/>
+                <a:ea typeface="Amiri" pitchFamily="2" charset="-78"/>
                 <a:cs typeface="Amiri" pitchFamily="2" charset="-78"/>
               </a:rPr>
               <a:t>وَرْشَةُ الكِتَابَةِ</a:t>
@@ -29322,6 +29525,7 @@
                   <a:srgbClr val="D4AF37"/>
                 </a:solidFill>
                 <a:latin typeface="Amiri" pitchFamily="2" charset="-78"/>
+                <a:ea typeface="Amiri" pitchFamily="2" charset="-78"/>
                 <a:cs typeface="Amiri" pitchFamily="2" charset="-78"/>
               </a:rPr>
               <a:t>م</a:t>
@@ -29642,6 +29846,7 @@
                   <a:srgbClr val="8A6D1E"/>
                 </a:solidFill>
                 <a:latin typeface="Amiri" pitchFamily="2" charset="-78"/>
+                <a:ea typeface="Amiri" pitchFamily="2" charset="-78"/>
                 <a:cs typeface="Amiri" pitchFamily="2" charset="-78"/>
               </a:rPr>
               <a:t>خَرِيطَةُ الوَرْشَةِ</a:t>
@@ -29956,6 +30161,7 @@
                   <a:srgbClr val="1B3B6F"/>
                 </a:solidFill>
                 <a:latin typeface="Amiri" pitchFamily="2" charset="-78"/>
+                <a:ea typeface="Amiri" pitchFamily="2" charset="-78"/>
                 <a:cs typeface="Amiri" pitchFamily="2" charset="-78"/>
               </a:rPr>
               <a:t>كَيْفَ</a:t>
@@ -30232,6 +30438,7 @@
                   <a:srgbClr val="1E6B52"/>
                 </a:solidFill>
                 <a:latin typeface="Amiri" pitchFamily="2" charset="-78"/>
+                <a:ea typeface="Amiri" pitchFamily="2" charset="-78"/>
                 <a:cs typeface="Amiri" pitchFamily="2" charset="-78"/>
               </a:rPr>
               <a:t>تَمْثِيلُ الدَّوْرِ</a:t>
@@ -30508,6 +30715,7 @@
                   <a:srgbClr val="8A6D1E"/>
                 </a:solidFill>
                 <a:latin typeface="Amiri" pitchFamily="2" charset="-78"/>
+                <a:ea typeface="Amiri" pitchFamily="2" charset="-78"/>
                 <a:cs typeface="Amiri" pitchFamily="2" charset="-78"/>
               </a:rPr>
               <a:t>النَّمُوذَجُ</a:t>
@@ -30784,6 +30992,7 @@
                   <a:srgbClr val="1E6B52"/>
                 </a:solidFill>
                 <a:latin typeface="Amiri" pitchFamily="2" charset="-78"/>
+                <a:ea typeface="Amiri" pitchFamily="2" charset="-78"/>
                 <a:cs typeface="Amiri" pitchFamily="2" charset="-78"/>
               </a:rPr>
               <a:t>المُحَادَثَةُ</a:t>
@@ -31060,6 +31269,7 @@
                   <a:srgbClr val="8A6D1E"/>
                 </a:solidFill>
                 <a:latin typeface="Amiri" pitchFamily="2" charset="-78"/>
+                <a:ea typeface="Amiri" pitchFamily="2" charset="-78"/>
                 <a:cs typeface="Amiri" pitchFamily="2" charset="-78"/>
               </a:rPr>
               <a:t>قَيِّمْ</a:t>
@@ -31303,6 +31513,7 @@
                   <a:srgbClr val="D4AF37"/>
                 </a:solidFill>
                 <a:latin typeface="Amiri" pitchFamily="2" charset="-78"/>
+                <a:ea typeface="Amiri" pitchFamily="2" charset="-78"/>
                 <a:cs typeface="Amiri" pitchFamily="2" charset="-78"/>
               </a:rPr>
               <a:t>م</a:t>
@@ -31623,6 +31834,7 @@
                   <a:srgbClr val="8A6D1E"/>
                 </a:solidFill>
                 <a:latin typeface="Amiri" pitchFamily="2" charset="-78"/>
+                <a:ea typeface="Amiri" pitchFamily="2" charset="-78"/>
                 <a:cs typeface="Amiri" pitchFamily="2" charset="-78"/>
               </a:rPr>
               <a:t>امْتِحَانُ التَّحَدُّثِ</a:t>
@@ -32247,6 +32459,7 @@
                   <a:srgbClr val="1B3B6F"/>
                 </a:solidFill>
                 <a:latin typeface="Amiri" pitchFamily="2" charset="-78"/>
+                <a:ea typeface="Amiri" pitchFamily="2" charset="-78"/>
                 <a:cs typeface="Amiri" pitchFamily="2" charset="-78"/>
               </a:rPr>
               <a:t>عَفْوًا، هَلْ يُمْكِنُ أَنْ تُعِيدَ السُّؤَالَ؟</a:t>
@@ -32346,6 +32559,7 @@
                   <a:srgbClr val="1B3B6F"/>
                 </a:solidFill>
                 <a:latin typeface="Amiri" pitchFamily="2" charset="-78"/>
+                <a:ea typeface="Amiri" pitchFamily="2" charset="-78"/>
                 <a:cs typeface="Amiri" pitchFamily="2" charset="-78"/>
               </a:rPr>
               <a:t>لَحْظَةً، دَعْنِي أُفَكِّرُ …</a:t>
@@ -32445,6 +32659,7 @@
                   <a:srgbClr val="1B3B6F"/>
                 </a:solidFill>
                 <a:latin typeface="Amiri" pitchFamily="2" charset="-78"/>
+                <a:ea typeface="Amiri" pitchFamily="2" charset="-78"/>
                 <a:cs typeface="Amiri" pitchFamily="2" charset="-78"/>
               </a:rPr>
               <a:t>أَقْصِدُ …</a:t>
@@ -32616,6 +32831,7 @@
                   <a:srgbClr val="D4AF37"/>
                 </a:solidFill>
                 <a:latin typeface="Amiri" pitchFamily="2" charset="-78"/>
+                <a:ea typeface="Amiri" pitchFamily="2" charset="-78"/>
                 <a:cs typeface="Amiri" pitchFamily="2" charset="-78"/>
               </a:rPr>
               <a:t>م</a:t>
@@ -32936,6 +33152,7 @@
                   <a:srgbClr val="8A6D1E"/>
                 </a:solidFill>
                 <a:latin typeface="Amiri" pitchFamily="2" charset="-78"/>
+                <a:ea typeface="Amiri" pitchFamily="2" charset="-78"/>
                 <a:cs typeface="Amiri" pitchFamily="2" charset="-78"/>
               </a:rPr>
               <a:t>المِحْوَرُ الثَّانِي فِي اثْنَتَيْ عَشْرَةَ بِنْيَةً</a:t>
@@ -33239,6 +33456,7 @@
                   <a:srgbClr val="1B3B6F"/>
                 </a:solidFill>
                 <a:latin typeface="Amiri" pitchFamily="2" charset="-78"/>
+                <a:ea typeface="Amiri" pitchFamily="2" charset="-78"/>
                 <a:cs typeface="Amiri" pitchFamily="2" charset="-78"/>
               </a:rPr>
               <a:t>عُمْرِي … سَنَةً</a:t>
@@ -33396,6 +33614,7 @@
                   <a:srgbClr val="1B3B6F"/>
                 </a:solidFill>
                 <a:latin typeface="Amiri" pitchFamily="2" charset="-78"/>
+                <a:ea typeface="Amiri" pitchFamily="2" charset="-78"/>
                 <a:cs typeface="Amiri" pitchFamily="2" charset="-78"/>
               </a:rPr>
               <a:t>وُلِدْتُ فِي</a:t>
@@ -33499,6 +33718,7 @@
                   <a:srgbClr val="1B3B6F"/>
                 </a:solidFill>
                 <a:latin typeface="Amiri" pitchFamily="2" charset="-78"/>
+                <a:ea typeface="Amiri" pitchFamily="2" charset="-78"/>
                 <a:cs typeface="Amiri" pitchFamily="2" charset="-78"/>
               </a:rPr>
               <a:t>عِيدُ مِيلَادِي</a:t>
@@ -33764,6 +33984,7 @@
                   <a:srgbClr val="1B3B6F"/>
                 </a:solidFill>
                 <a:latin typeface="Amiri" pitchFamily="2" charset="-78"/>
+                <a:ea typeface="Amiri" pitchFamily="2" charset="-78"/>
                 <a:cs typeface="Amiri" pitchFamily="2" charset="-78"/>
               </a:rPr>
               <a:t>أَخٌ · أُخْتٌ</a:t>
@@ -33921,6 +34142,7 @@
                   <a:srgbClr val="1B3B6F"/>
                 </a:solidFill>
                 <a:latin typeface="Amiri" pitchFamily="2" charset="-78"/>
+                <a:ea typeface="Amiri" pitchFamily="2" charset="-78"/>
                 <a:cs typeface="Amiri" pitchFamily="2" charset="-78"/>
               </a:rPr>
               <a:t>أَخَوَاتٌ</a:t>
@@ -34024,6 +34246,7 @@
                   <a:srgbClr val="1B3B6F"/>
                 </a:solidFill>
                 <a:latin typeface="Amiri" pitchFamily="2" charset="-78"/>
+                <a:ea typeface="Amiri" pitchFamily="2" charset="-78"/>
                 <a:cs typeface="Amiri" pitchFamily="2" charset="-78"/>
               </a:rPr>
               <a:t>إِخْوَةٌ</a:t>
@@ -34289,6 +34512,7 @@
                   <a:srgbClr val="1B3B6F"/>
                 </a:solidFill>
                 <a:latin typeface="Amiri" pitchFamily="2" charset="-78"/>
+                <a:ea typeface="Amiri" pitchFamily="2" charset="-78"/>
                 <a:cs typeface="Amiri" pitchFamily="2" charset="-78"/>
               </a:rPr>
               <a:t>طَوِيلٌ · طَوِيلَةٌ</a:t>
@@ -34446,6 +34670,7 @@
                   <a:srgbClr val="1B3B6F"/>
                 </a:solidFill>
                 <a:latin typeface="Amiri" pitchFamily="2" charset="-78"/>
+                <a:ea typeface="Amiri" pitchFamily="2" charset="-78"/>
                 <a:cs typeface="Amiri" pitchFamily="2" charset="-78"/>
               </a:rPr>
               <a:t>مَرِحٌ · مَرِحَةٌ</a:t>
@@ -34549,6 +34774,7 @@
                   <a:srgbClr val="1B3B6F"/>
                 </a:solidFill>
                 <a:latin typeface="Amiri" pitchFamily="2" charset="-78"/>
+                <a:ea typeface="Amiri" pitchFamily="2" charset="-78"/>
                 <a:cs typeface="Amiri" pitchFamily="2" charset="-78"/>
               </a:rPr>
               <a:t>لَطِيفٌ · لَطِيفَةٌ</a:t>
@@ -34814,6 +35040,7 @@
                   <a:srgbClr val="1B3B6F"/>
                 </a:solidFill>
                 <a:latin typeface="Amiri" pitchFamily="2" charset="-78"/>
+                <a:ea typeface="Amiri" pitchFamily="2" charset="-78"/>
                 <a:cs typeface="Amiri" pitchFamily="2" charset="-78"/>
               </a:rPr>
               <a:t>غُرْفَتِي وَاسِعَةٌ</a:t>
@@ -34971,6 +35198,7 @@
                   <a:srgbClr val="1B3B6F"/>
                 </a:solidFill>
                 <a:latin typeface="Amiri" pitchFamily="2" charset="-78"/>
+                <a:ea typeface="Amiri" pitchFamily="2" charset="-78"/>
                 <a:cs typeface="Amiri" pitchFamily="2" charset="-78"/>
               </a:rPr>
               <a:t>حَدِيقَةٌ</a:t>
@@ -35074,6 +35302,7 @@
                   <a:srgbClr val="1B3B6F"/>
                 </a:solidFill>
                 <a:latin typeface="Amiri" pitchFamily="2" charset="-78"/>
+                <a:ea typeface="Amiri" pitchFamily="2" charset="-78"/>
                 <a:cs typeface="Amiri" pitchFamily="2" charset="-78"/>
               </a:rPr>
               <a:t>غُرَفٌ وَاسِعَةٌ</a:t>
@@ -35339,6 +35568,7 @@
                   <a:srgbClr val="1B3B6F"/>
                 </a:solidFill>
                 <a:latin typeface="Amiri" pitchFamily="2" charset="-78"/>
+                <a:ea typeface="Amiri" pitchFamily="2" charset="-78"/>
                 <a:cs typeface="Amiri" pitchFamily="2" charset="-78"/>
               </a:rPr>
               <a:t>بِجَانِبِ · فَوْقَ · تَحْتَ</a:t>
@@ -35496,6 +35726,7 @@
                   <a:srgbClr val="1B3B6F"/>
                 </a:solidFill>
                 <a:latin typeface="Amiri" pitchFamily="2" charset="-78"/>
+                <a:ea typeface="Amiri" pitchFamily="2" charset="-78"/>
                 <a:cs typeface="Amiri" pitchFamily="2" charset="-78"/>
               </a:rPr>
               <a:t>خَلْفَ</a:t>
@@ -35599,6 +35830,7 @@
                   <a:srgbClr val="1B3B6F"/>
                 </a:solidFill>
                 <a:latin typeface="Amiri" pitchFamily="2" charset="-78"/>
+                <a:ea typeface="Amiri" pitchFamily="2" charset="-78"/>
                 <a:cs typeface="Amiri" pitchFamily="2" charset="-78"/>
               </a:rPr>
               <a:t>أَمَامَ</a:t>
@@ -35864,6 +36096,7 @@
                   <a:srgbClr val="1B3B6F"/>
                 </a:solidFill>
                 <a:latin typeface="Amiri" pitchFamily="2" charset="-78"/>
+                <a:ea typeface="Amiri" pitchFamily="2" charset="-78"/>
                 <a:cs typeface="Amiri" pitchFamily="2" charset="-78"/>
               </a:rPr>
               <a:t>أَحْمَرُ · حَمْرَاءُ</a:t>
@@ -36021,6 +36254,7 @@
                   <a:srgbClr val="1B3B6F"/>
                 </a:solidFill>
                 <a:latin typeface="Amiri" pitchFamily="2" charset="-78"/>
+                <a:ea typeface="Amiri" pitchFamily="2" charset="-78"/>
                 <a:cs typeface="Amiri" pitchFamily="2" charset="-78"/>
               </a:rPr>
               <a:t>أَبْيَضُ · بَيْضَاءُ</a:t>
@@ -36124,6 +36358,7 @@
                   <a:srgbClr val="1B3B6F"/>
                 </a:solidFill>
                 <a:latin typeface="Amiri" pitchFamily="2" charset="-78"/>
+                <a:ea typeface="Amiri" pitchFamily="2" charset="-78"/>
                 <a:cs typeface="Amiri" pitchFamily="2" charset="-78"/>
               </a:rPr>
               <a:t>أَزْرَقُ · زَرْقَاءُ</a:t>
@@ -36257,6 +36492,7 @@
                   <a:srgbClr val="D4AF37"/>
                 </a:solidFill>
                 <a:latin typeface="Amiri" pitchFamily="2" charset="-78"/>
+                <a:ea typeface="Amiri" pitchFamily="2" charset="-78"/>
                 <a:cs typeface="Amiri" pitchFamily="2" charset="-78"/>
               </a:rPr>
               <a:t>م</a:t>
@@ -36577,6 +36813,7 @@
                   <a:srgbClr val="8A6D1E"/>
                 </a:solidFill>
                 <a:latin typeface="Amiri" pitchFamily="2" charset="-78"/>
+                <a:ea typeface="Amiri" pitchFamily="2" charset="-78"/>
                 <a:cs typeface="Amiri" pitchFamily="2" charset="-78"/>
               </a:rPr>
               <a:t>بِنْيَاتٌ تَرْفَعُ الدَّرَجَةَ</a:t>
@@ -36880,6 +37117,7 @@
                   <a:srgbClr val="1B3B6F"/>
                 </a:solidFill>
                 <a:latin typeface="Amiri" pitchFamily="2" charset="-78"/>
+                <a:ea typeface="Amiri" pitchFamily="2" charset="-78"/>
                 <a:cs typeface="Amiri" pitchFamily="2" charset="-78"/>
               </a:rPr>
               <a:t>مَقَاسٌ</a:t>
@@ -37037,6 +37275,7 @@
                   <a:srgbClr val="1B3B6F"/>
                 </a:solidFill>
                 <a:latin typeface="Amiri" pitchFamily="2" charset="-78"/>
+                <a:ea typeface="Amiri" pitchFamily="2" charset="-78"/>
                 <a:cs typeface="Amiri" pitchFamily="2" charset="-78"/>
               </a:rPr>
               <a:t>هَلْ أَسْتَطِيعُ أَنْ أُجَرِّبَهُ؟</a:t>
@@ -37140,6 +37379,7 @@
                   <a:srgbClr val="1B3B6F"/>
                 </a:solidFill>
                 <a:latin typeface="Amiri" pitchFamily="2" charset="-78"/>
+                <a:ea typeface="Amiri" pitchFamily="2" charset="-78"/>
                 <a:cs typeface="Amiri" pitchFamily="2" charset="-78"/>
               </a:rPr>
               <a:t>كَبِيرٌ جِدًّا</a:t>
@@ -37405,6 +37645,7 @@
                   <a:srgbClr val="1B3B6F"/>
                 </a:solidFill>
                 <a:latin typeface="Amiri" pitchFamily="2" charset="-78"/>
+                <a:ea typeface="Amiri" pitchFamily="2" charset="-78"/>
                 <a:cs typeface="Amiri" pitchFamily="2" charset="-78"/>
               </a:rPr>
               <a:t>هِوَايَتِي …</a:t>
@@ -37562,6 +37803,7 @@
                   <a:srgbClr val="1B3B6F"/>
                 </a:solidFill>
                 <a:latin typeface="Amiri" pitchFamily="2" charset="-78"/>
+                <a:ea typeface="Amiri" pitchFamily="2" charset="-78"/>
                 <a:cs typeface="Amiri" pitchFamily="2" charset="-78"/>
               </a:rPr>
               <a:t>فِي وَقْتِ فَرَاغِي</a:t>
@@ -37665,6 +37907,7 @@
                   <a:srgbClr val="1B3B6F"/>
                 </a:solidFill>
                 <a:latin typeface="Amiri" pitchFamily="2" charset="-78"/>
+                <a:ea typeface="Amiri" pitchFamily="2" charset="-78"/>
                 <a:cs typeface="Amiri" pitchFamily="2" charset="-78"/>
               </a:rPr>
               <a:t>أَلْعَبُ</a:t>
@@ -37930,6 +38173,7 @@
                   <a:srgbClr val="1B3B6F"/>
                 </a:solidFill>
                 <a:latin typeface="Amiri" pitchFamily="2" charset="-78"/>
+                <a:ea typeface="Amiri" pitchFamily="2" charset="-78"/>
                 <a:cs typeface="Amiri" pitchFamily="2" charset="-78"/>
               </a:rPr>
               <a:t>هَلْ تُرِيدِينَ أَنْ …؟</a:t>
@@ -38087,6 +38331,7 @@
                   <a:srgbClr val="1B3B6F"/>
                 </a:solidFill>
                 <a:latin typeface="Amiri" pitchFamily="2" charset="-78"/>
+                <a:ea typeface="Amiri" pitchFamily="2" charset="-78"/>
                 <a:cs typeface="Amiri" pitchFamily="2" charset="-78"/>
               </a:rPr>
               <a:t>آسِفَةٌ، لَا أَسْتَطِيعُ</a:t>
@@ -38190,6 +38435,7 @@
                   <a:srgbClr val="1B3B6F"/>
                 </a:solidFill>
                 <a:latin typeface="Amiri" pitchFamily="2" charset="-78"/>
+                <a:ea typeface="Amiri" pitchFamily="2" charset="-78"/>
                 <a:cs typeface="Amiri" pitchFamily="2" charset="-78"/>
               </a:rPr>
               <a:t>بِكُلِّ سُرُورٍ</a:t>
@@ -38455,6 +38701,7 @@
                   <a:srgbClr val="1B3B6F"/>
                 </a:solidFill>
                 <a:latin typeface="Amiri" pitchFamily="2" charset="-78"/>
+                <a:ea typeface="Amiri" pitchFamily="2" charset="-78"/>
                 <a:cs typeface="Amiri" pitchFamily="2" charset="-78"/>
               </a:rPr>
               <a:t>قَضَيْتُ العُطْلَةَ فِي …</a:t>
@@ -38612,6 +38859,7 @@
                   <a:srgbClr val="1B3B6F"/>
                 </a:solidFill>
                 <a:latin typeface="Amiri" pitchFamily="2" charset="-78"/>
+                <a:ea typeface="Amiri" pitchFamily="2" charset="-78"/>
                 <a:cs typeface="Amiri" pitchFamily="2" charset="-78"/>
               </a:rPr>
               <a:t>كَانَ / كَانَتْ</a:t>
@@ -38715,6 +38963,7 @@
                   <a:srgbClr val="1B3B6F"/>
                 </a:solidFill>
                 <a:latin typeface="Amiri" pitchFamily="2" charset="-78"/>
+                <a:ea typeface="Amiri" pitchFamily="2" charset="-78"/>
                 <a:cs typeface="Amiri" pitchFamily="2" charset="-78"/>
               </a:rPr>
               <a:t>أَقَمْنَا</a:t>
@@ -38980,6 +39229,7 @@
                   <a:srgbClr val="1B3B6F"/>
                 </a:solidFill>
                 <a:latin typeface="Amiri" pitchFamily="2" charset="-78"/>
+                <a:ea typeface="Amiri" pitchFamily="2" charset="-78"/>
                 <a:cs typeface="Amiri" pitchFamily="2" charset="-78"/>
               </a:rPr>
               <a:t>أَكْبَرُ مِنْ · أَجْمَلُ مِنْ</a:t>
@@ -39137,6 +39387,7 @@
                   <a:srgbClr val="1B3B6F"/>
                 </a:solidFill>
                 <a:latin typeface="Amiri" pitchFamily="2" charset="-78"/>
+                <a:ea typeface="Amiri" pitchFamily="2" charset="-78"/>
                 <a:cs typeface="Amiri" pitchFamily="2" charset="-78"/>
               </a:rPr>
               <a:t>نَفْسُ … / … نَفْسُهُ</a:t>
@@ -39240,6 +39491,7 @@
                   <a:srgbClr val="1B3B6F"/>
                 </a:solidFill>
                 <a:latin typeface="Amiri" pitchFamily="2" charset="-78"/>
+                <a:ea typeface="Amiri" pitchFamily="2" charset="-78"/>
                 <a:cs typeface="Amiri" pitchFamily="2" charset="-78"/>
               </a:rPr>
               <a:t>أَعَزُّ صَدِيقَاتِي</a:t>
@@ -39505,6 +39757,7 @@
                   <a:srgbClr val="1B3B6F"/>
                 </a:solidFill>
                 <a:latin typeface="Amiri" pitchFamily="2" charset="-78"/>
+                <a:ea typeface="Amiri" pitchFamily="2" charset="-78"/>
                 <a:cs typeface="Amiri" pitchFamily="2" charset="-78"/>
               </a:rPr>
               <a:t>صَحِيحٌ أَنَّ … غَيْرَ أَنَّ …</a:t>
@@ -39662,6 +39915,7 @@
                   <a:srgbClr val="1B3B6F"/>
                 </a:solidFill>
                 <a:latin typeface="Amiri" pitchFamily="2" charset="-78"/>
+                <a:ea typeface="Amiri" pitchFamily="2" charset="-78"/>
                 <a:cs typeface="Amiri" pitchFamily="2" charset="-78"/>
               </a:rPr>
               <a:t>مِمَّا</a:t>
@@ -39765,6 +40019,7 @@
                   <a:srgbClr val="1B3B6F"/>
                 </a:solidFill>
                 <a:latin typeface="Amiri" pitchFamily="2" charset="-78"/>
+                <a:ea typeface="Amiri" pitchFamily="2" charset="-78"/>
                 <a:cs typeface="Amiri" pitchFamily="2" charset="-78"/>
               </a:rPr>
               <a:t>لَوْ كَانَ عِنْدِي بَيْتٌ كَبِيرٌ لَدَعَوْتُ</a:t>
@@ -39898,6 +40153,7 @@
                   <a:srgbClr val="D4AF37"/>
                 </a:solidFill>
                 <a:latin typeface="Amiri" pitchFamily="2" charset="-78"/>
+                <a:ea typeface="Amiri" pitchFamily="2" charset="-78"/>
                 <a:cs typeface="Amiri" pitchFamily="2" charset="-78"/>
               </a:rPr>
               <a:t>م</a:t>
@@ -40218,6 +40474,7 @@
                   <a:srgbClr val="8A6D1E"/>
                 </a:solidFill>
                 <a:latin typeface="Amiri" pitchFamily="2" charset="-78"/>
+                <a:ea typeface="Amiri" pitchFamily="2" charset="-78"/>
                 <a:cs typeface="Amiri" pitchFamily="2" charset="-78"/>
               </a:rPr>
               <a:t>فِي الغُرَفِ</a:t>
@@ -41394,6 +41651,7 @@
                   <a:srgbClr val="1B3B6F"/>
                 </a:solidFill>
                 <a:latin typeface="Amiri" pitchFamily="2" charset="-78"/>
+                <a:ea typeface="Amiri" pitchFamily="2" charset="-78"/>
                 <a:cs typeface="Amiri" pitchFamily="2" charset="-78"/>
               </a:rPr>
               <a:t>دَوْرُكَ!</a:t>
@@ -41470,6 +41728,7 @@
                   <a:srgbClr val="1B3B6F"/>
                 </a:solidFill>
                 <a:latin typeface="Amiri" pitchFamily="2" charset="-78"/>
+                <a:ea typeface="Amiri" pitchFamily="2" charset="-78"/>
                 <a:cs typeface="Amiri" pitchFamily="2" charset="-78"/>
               </a:rPr>
               <a:t>أَحْسَنْتَ! / أَحْسَنْتِ!</a:t>
@@ -41546,6 +41805,7 @@
                   <a:srgbClr val="1B3B6F"/>
                 </a:solidFill>
                 <a:latin typeface="Amiri" pitchFamily="2" charset="-78"/>
+                <a:ea typeface="Amiri" pitchFamily="2" charset="-78"/>
                 <a:cs typeface="Amiri" pitchFamily="2" charset="-78"/>
               </a:rPr>
               <a:t>تَكَلَّمْ أَكْثَرَ، مِنْ فَضْلِكَ</a:t>
@@ -41622,6 +41882,7 @@
                   <a:srgbClr val="1B3B6F"/>
                 </a:solidFill>
                 <a:latin typeface="Amiri" pitchFamily="2" charset="-78"/>
+                <a:ea typeface="Amiri" pitchFamily="2" charset="-78"/>
                 <a:cs typeface="Amiri" pitchFamily="2" charset="-78"/>
               </a:rPr>
               <a:t>لِمَاذَا؟</a:t>
@@ -41793,6 +42054,7 @@
                   <a:srgbClr val="D4AF37"/>
                 </a:solidFill>
                 <a:latin typeface="Amiri" pitchFamily="2" charset="-78"/>
+                <a:ea typeface="Amiri" pitchFamily="2" charset="-78"/>
                 <a:cs typeface="Amiri" pitchFamily="2" charset="-78"/>
               </a:rPr>
               <a:t>م</a:t>
@@ -42113,6 +42375,7 @@
                   <a:srgbClr val="8A6D1E"/>
                 </a:solidFill>
                 <a:latin typeface="Amiri" pitchFamily="2" charset="-78"/>
+                <a:ea typeface="Amiri" pitchFamily="2" charset="-78"/>
                 <a:cs typeface="Amiri" pitchFamily="2" charset="-78"/>
               </a:rPr>
               <a:t>فِي مَحَلِّ المَلَابِسِ</a:t>
@@ -42393,6 +42656,7 @@
                   <a:srgbClr val="1B3B6F"/>
                 </a:solidFill>
                 <a:latin typeface="Amiri" pitchFamily="2" charset="-78"/>
+                <a:ea typeface="Amiri" pitchFamily="2" charset="-78"/>
                 <a:cs typeface="Amiri" pitchFamily="2" charset="-78"/>
               </a:rPr>
               <a:t>أُرِيدُ …</a:t>
@@ -42469,6 +42733,7 @@
                   <a:srgbClr val="1B3B6F"/>
                 </a:solidFill>
                 <a:latin typeface="Amiri" pitchFamily="2" charset="-78"/>
+                <a:ea typeface="Amiri" pitchFamily="2" charset="-78"/>
                 <a:cs typeface="Amiri" pitchFamily="2" charset="-78"/>
               </a:rPr>
               <a:t>أَهْلًا! كَيْفَ أُسَاعِدُكِ؟</a:t>
@@ -42637,6 +42902,7 @@
                   <a:srgbClr val="5A6472"/>
                 </a:solidFill>
                 <a:latin typeface="Amiri" pitchFamily="2" charset="-78"/>
+                <a:ea typeface="Amiri" pitchFamily="2" charset="-78"/>
                 <a:cs typeface="Amiri" pitchFamily="2" charset="-78"/>
               </a:rPr>
               <a:t>أُفَضِّلُ</a:t>
@@ -42726,6 +42992,7 @@
                   <a:srgbClr val="1B3B6F"/>
                 </a:solidFill>
                 <a:latin typeface="Amiri" pitchFamily="2" charset="-78"/>
+                <a:ea typeface="Amiri" pitchFamily="2" charset="-78"/>
                 <a:cs typeface="Amiri" pitchFamily="2" charset="-78"/>
               </a:rPr>
               <a:t>أَيَّ لَوْنٍ تُفَضِّلِينَ؟</a:t>
@@ -42894,6 +43161,7 @@
                   <a:srgbClr val="1B3B6F"/>
                 </a:solidFill>
                 <a:latin typeface="Amiri" pitchFamily="2" charset="-78"/>
+                <a:ea typeface="Amiri" pitchFamily="2" charset="-78"/>
                 <a:cs typeface="Amiri" pitchFamily="2" charset="-78"/>
               </a:rPr>
               <a:t>مَقَاسِي …</a:t>
@@ -42970,6 +43238,7 @@
                   <a:srgbClr val="1B3B6F"/>
                 </a:solidFill>
                 <a:latin typeface="Amiri" pitchFamily="2" charset="-78"/>
+                <a:ea typeface="Amiri" pitchFamily="2" charset="-78"/>
                 <a:cs typeface="Amiri" pitchFamily="2" charset="-78"/>
               </a:rPr>
               <a:t>مَا مَقَاسُكِ؟</a:t>
@@ -43138,6 +43407,7 @@
                   <a:srgbClr val="1B3B6F"/>
                 </a:solidFill>
                 <a:latin typeface="Amiri" pitchFamily="2" charset="-78"/>
+                <a:ea typeface="Amiri" pitchFamily="2" charset="-78"/>
                 <a:cs typeface="Amiri" pitchFamily="2" charset="-78"/>
               </a:rPr>
               <a:t>كَمْ ثَمَنُهَا؟</a:t>
@@ -43214,6 +43484,7 @@
                   <a:srgbClr val="1B3B6F"/>
                 </a:solidFill>
                 <a:latin typeface="Amiri" pitchFamily="2" charset="-78"/>
+                <a:ea typeface="Amiri" pitchFamily="2" charset="-78"/>
                 <a:cs typeface="Amiri" pitchFamily="2" charset="-78"/>
               </a:rPr>
               <a:t>تَفَضَّلِي، هٰذِهِ جَمِيلَةٌ.</a:t>
@@ -43382,6 +43653,7 @@
                   <a:srgbClr val="1B3B6F"/>
                 </a:solidFill>
                 <a:latin typeface="Amiri" pitchFamily="2" charset="-78"/>
+                <a:ea typeface="Amiri" pitchFamily="2" charset="-78"/>
                 <a:cs typeface="Amiri" pitchFamily="2" charset="-78"/>
               </a:rPr>
               <a:t>لِأَنِّي سَأُسَافِرُ إِلَى …</a:t>
@@ -43458,6 +43730,7 @@
                   <a:srgbClr val="1B3B6F"/>
                 </a:solidFill>
                 <a:latin typeface="Amiri" pitchFamily="2" charset="-78"/>
+                <a:ea typeface="Amiri" pitchFamily="2" charset="-78"/>
                 <a:cs typeface="Amiri" pitchFamily="2" charset="-78"/>
               </a:rPr>
               <a:t>أَرْبَعُونَ جُنَيْهًا. لِأَيِّ مُنَاسَبَةٍ تَشْتَرِينَهَا؟</a:t>
@@ -43732,6 +44005,7 @@
                   <a:srgbClr val="D4AF37"/>
                 </a:solidFill>
                 <a:latin typeface="Amiri" pitchFamily="2" charset="-78"/>
+                <a:ea typeface="Amiri" pitchFamily="2" charset="-78"/>
                 <a:cs typeface="Amiri" pitchFamily="2" charset="-78"/>
               </a:rPr>
               <a:t>م</a:t>
@@ -44052,6 +44326,7 @@
                   <a:srgbClr val="8A6D1E"/>
                 </a:solidFill>
                 <a:latin typeface="Amiri" pitchFamily="2" charset="-78"/>
+                <a:ea typeface="Amiri" pitchFamily="2" charset="-78"/>
                 <a:cs typeface="Amiri" pitchFamily="2" charset="-78"/>
               </a:rPr>
               <a:t>دَعْوَةٌ إِلَى عِيدِ مِيلَادٍ</a:t>
@@ -44332,6 +44607,7 @@
                   <a:srgbClr val="1B3B6F"/>
                 </a:solidFill>
                 <a:latin typeface="Amiri" pitchFamily="2" charset="-78"/>
+                <a:ea typeface="Amiri" pitchFamily="2" charset="-78"/>
                 <a:cs typeface="Amiri" pitchFamily="2" charset="-78"/>
               </a:rPr>
               <a:t>هَلْ تُرِيدِينَ أَنْ تَأْتِيَ إِلَى … يَوْمَ …؟</a:t>
@@ -44408,6 +44684,7 @@
                   <a:srgbClr val="1B3B6F"/>
                 </a:solidFill>
                 <a:latin typeface="Amiri" pitchFamily="2" charset="-78"/>
+                <a:ea typeface="Amiri" pitchFamily="2" charset="-78"/>
                 <a:cs typeface="Amiri" pitchFamily="2" charset="-78"/>
               </a:rPr>
               <a:t>أَلُو، مَرْحَبًا!</a:t>
@@ -44576,6 +44853,7 @@
                   <a:srgbClr val="1B3B6F"/>
                 </a:solidFill>
                 <a:latin typeface="Amiri" pitchFamily="2" charset="-78"/>
+                <a:ea typeface="Amiri" pitchFamily="2" charset="-78"/>
                 <a:cs typeface="Amiri" pitchFamily="2" charset="-78"/>
               </a:rPr>
               <a:t>فِي السَّاعَةِ … فِي …</a:t>
@@ -44652,6 +44930,7 @@
                   <a:srgbClr val="1B3B6F"/>
                 </a:solidFill>
                 <a:latin typeface="Amiri" pitchFamily="2" charset="-78"/>
+                <a:ea typeface="Amiri" pitchFamily="2" charset="-78"/>
                 <a:cs typeface="Amiri" pitchFamily="2" charset="-78"/>
               </a:rPr>
               <a:t>بِكُلِّ سُرُورٍ! فِي أَيِّ سَاعَةٍ؟</a:t>
@@ -44820,6 +45099,7 @@
                   <a:srgbClr val="1B3B6F"/>
                 </a:solidFill>
                 <a:latin typeface="Amiri" pitchFamily="2" charset="-78"/>
+                <a:ea typeface="Amiri" pitchFamily="2" charset="-78"/>
                 <a:cs typeface="Amiri" pitchFamily="2" charset="-78"/>
               </a:rPr>
               <a:t>سَنَأْكُلُ … ثُمَّ …</a:t>
@@ -44896,6 +45176,7 @@
                   <a:srgbClr val="1B3B6F"/>
                 </a:solidFill>
                 <a:latin typeface="Amiri" pitchFamily="2" charset="-78"/>
+                <a:ea typeface="Amiri" pitchFamily="2" charset="-78"/>
                 <a:cs typeface="Amiri" pitchFamily="2" charset="-78"/>
               </a:rPr>
               <a:t>مَاذَا سَنَفْعَلُ؟</a:t>
@@ -44999,6 +45280,7 @@
                   <a:srgbClr val="1B3B6F"/>
                 </a:solidFill>
                 <a:latin typeface="Amiri" pitchFamily="2" charset="-78"/>
+                <a:ea typeface="Amiri" pitchFamily="2" charset="-78"/>
                 <a:cs typeface="Amiri" pitchFamily="2" charset="-78"/>
               </a:rPr>
               <a:t>الْبَسِي … ؛ وَهَلْ …؟</a:t>
@@ -45075,6 +45357,7 @@
                   <a:srgbClr val="1B3B6F"/>
                 </a:solidFill>
                 <a:latin typeface="Amiri" pitchFamily="2" charset="-78"/>
+                <a:ea typeface="Amiri" pitchFamily="2" charset="-78"/>
                 <a:cs typeface="Amiri" pitchFamily="2" charset="-78"/>
               </a:rPr>
               <a:t>رَائِعٌ! مَاذَا أَلْبَسُ؟</a:t>
@@ -45178,6 +45461,7 @@
                   <a:srgbClr val="1B3B6F"/>
                 </a:solidFill>
                 <a:latin typeface="Amiri" pitchFamily="2" charset="-78"/>
+                <a:ea typeface="Amiri" pitchFamily="2" charset="-78"/>
                 <a:cs typeface="Amiri" pitchFamily="2" charset="-78"/>
               </a:rPr>
               <a:t>ذَهَبْتُ … وَكَانَ …</a:t>
@@ -45254,6 +45538,7 @@
                   <a:srgbClr val="1B3B6F"/>
                 </a:solidFill>
                 <a:latin typeface="Amiri" pitchFamily="2" charset="-78"/>
+                <a:ea typeface="Amiri" pitchFamily="2" charset="-78"/>
                 <a:cs typeface="Amiri" pitchFamily="2" charset="-78"/>
               </a:rPr>
               <a:t>طَبْعًا. مَاذَا فَعَلْتِ فِي عِيدِ مِيلَادِكِ المَاضِي؟</a:t>
@@ -45428,13 +45713,9 @@
     <a:fontScheme name="Office">
       <a:majorFont>
         <a:latin typeface="Calibri Light" panose="020F0302020204030204"/>
-        <a:ea typeface=""/>
-        <a:cs typeface=""/>
-        <a:font script="Jpan" typeface="游ゴシック Light"/>
-        <a:font script="Hang" typeface="맑은 고딕"/>
-        <a:font script="Hans" typeface="等线 Light"/>
-        <a:font script="Hant" typeface="新細明體"/>
-        <a:font script="Arab" typeface="Times New Roman"/>
+        <a:ea typeface="Amiri" pitchFamily="2" charset="-78"/>
+        <a:cs typeface="Amiri" pitchFamily="2" charset="-78"/>
+        <a:font script="Arab" typeface="Amiri"/>
         <a:font script="Hebr" typeface="Times New Roman"/>
         <a:font script="Thai" typeface="Angsana New"/>
         <a:font script="Ethi" typeface="Nyala"/>
@@ -45480,13 +45761,9 @@
       </a:majorFont>
       <a:minorFont>
         <a:latin typeface="Calibri" panose="020F0502020204030204"/>
-        <a:ea typeface=""/>
-        <a:cs typeface=""/>
-        <a:font script="Jpan" typeface="游ゴシック"/>
-        <a:font script="Hang" typeface="맑은 고딕"/>
-        <a:font script="Hans" typeface="等线"/>
-        <a:font script="Hant" typeface="新細明體"/>
-        <a:font script="Arab" typeface="Arial"/>
+        <a:ea typeface="Amiri" pitchFamily="2" charset="-78"/>
+        <a:cs typeface="Amiri" pitchFamily="2" charset="-78"/>
+        <a:font script="Arab" typeface="Amiri"/>
         <a:font script="Hebr" typeface="Arial"/>
         <a:font script="Thai" typeface="Cordia New"/>
         <a:font script="Ethi" typeface="Nyala"/>
